--- a/public/fun/pack/pptx/wedding/결혼식_08_식순중심_처마밑제비집.pptx
+++ b/public/fun/pack/pptx/wedding/결혼식_08_식순중심_처마밑제비집.pptx
@@ -3347,7 +3347,7 @@
             <a:r>
               <a:rPr sz="3600" b="1" i="0">
                 <a:solidFill>
-                  <a:srgbClr val="16263B"/>
+                  <a:srgbClr val="1D4072"/>
                 </a:solidFill>
               </a:rPr>
               <a:t>저희 결혼합니다</a:t>
@@ -3385,7 +3385,7 @@
             <a:r>
               <a:rPr sz="1700" b="0" i="1">
                 <a:solidFill>
-                  <a:srgbClr val="16263B"/>
+                  <a:srgbClr val="1D4072"/>
                 </a:solidFill>
               </a:rPr>
               <a:t>신랑 신부 입장으로 시작합니다</a:t>
@@ -3460,7 +3460,7 @@
     <p:bg>
       <p:bgPr>
         <a:solidFill>
-          <a:srgbClr val="F0F4F9"/>
+          <a:srgbClr val="F3F7FC"/>
         </a:solidFill>
         <a:effectLst/>
       </p:bgPr>
@@ -3490,7 +3490,7 @@
             </a:avLst>
           </a:prstGeom>
           <a:solidFill>
-            <a:srgbClr val="D1DEF0"/>
+            <a:srgbClr val="D4E3F7"/>
           </a:solidFill>
           <a:ln>
             <a:noFill/>
@@ -3534,7 +3534,7 @@
             <a:r>
               <a:rPr sz="3000" b="1" i="0">
                 <a:solidFill>
-                  <a:srgbClr val="16263B"/>
+                  <a:srgbClr val="1D4072"/>
                 </a:solidFill>
               </a:rPr>
               <a:t>신랑 · 신부 소개</a:t>
@@ -3557,11 +3557,11 @@
             <a:avLst/>
           </a:prstGeom>
           <a:solidFill>
-            <a:srgbClr val="D1DEF0"/>
+            <a:srgbClr val="D4E3F7"/>
           </a:solidFill>
           <a:ln w="19050">
             <a:solidFill>
-              <a:srgbClr val="2A476F"/>
+              <a:srgbClr val="4981D0"/>
             </a:solidFill>
             <a:prstDash val="dash"/>
           </a:ln>
@@ -3580,7 +3580,7 @@
             <a:r>
               <a:rPr sz="1200" b="0" i="0">
                 <a:solidFill>
-                  <a:srgbClr val="16263B"/>
+                  <a:srgbClr val="1D4072"/>
                 </a:solidFill>
               </a:rPr>
               <a:t>사진</a:t>
@@ -3618,7 +3618,7 @@
             <a:r>
               <a:rPr sz="1600" b="1" i="0">
                 <a:solidFill>
-                  <a:srgbClr val="16263B"/>
+                  <a:srgbClr val="1D4072"/>
                 </a:solidFill>
               </a:rPr>
               <a:t>신랑</a:t>
@@ -3709,11 +3709,11 @@
             <a:avLst/>
           </a:prstGeom>
           <a:solidFill>
-            <a:srgbClr val="D1DEF0"/>
+            <a:srgbClr val="D4E3F7"/>
           </a:solidFill>
           <a:ln w="19050">
             <a:solidFill>
-              <a:srgbClr val="2A476F"/>
+              <a:srgbClr val="4981D0"/>
             </a:solidFill>
             <a:prstDash val="dash"/>
           </a:ln>
@@ -3732,7 +3732,7 @@
             <a:r>
               <a:rPr sz="1200" b="0" i="0">
                 <a:solidFill>
-                  <a:srgbClr val="16263B"/>
+                  <a:srgbClr val="1D4072"/>
                 </a:solidFill>
               </a:rPr>
               <a:t>사진</a:t>
@@ -3770,7 +3770,7 @@
             <a:r>
               <a:rPr sz="1600" b="1" i="0">
                 <a:solidFill>
-                  <a:srgbClr val="16263B"/>
+                  <a:srgbClr val="1D4072"/>
                 </a:solidFill>
               </a:rPr>
               <a:t>신부</a:t>
@@ -3860,7 +3860,7 @@
     <p:bg>
       <p:bgPr>
         <a:solidFill>
-          <a:srgbClr val="F0F4F9"/>
+          <a:srgbClr val="F3F7FC"/>
         </a:solidFill>
         <a:effectLst/>
       </p:bgPr>
@@ -3890,7 +3890,7 @@
             </a:avLst>
           </a:prstGeom>
           <a:solidFill>
-            <a:srgbClr val="D1DEF0"/>
+            <a:srgbClr val="D4E3F7"/>
           </a:solidFill>
           <a:ln>
             <a:noFill/>
@@ -3934,7 +3934,7 @@
             <a:r>
               <a:rPr sz="3000" b="1" i="0">
                 <a:solidFill>
-                  <a:srgbClr val="16263B"/>
+                  <a:srgbClr val="1D4072"/>
                 </a:solidFill>
               </a:rPr>
               <a:t>식순 안내</a:t>
@@ -3985,30 +3985,30 @@
                   <a:tcPr anchor="ctr" marL="73152" marR="73152">
                     <a:lnL w="9525" cap="flat" cmpd="sng" algn="ctr">
                       <a:solidFill>
-                        <a:srgbClr val="2A476F"/>
+                        <a:srgbClr val="4981D0"/>
                       </a:solidFill>
                       <a:prstDash val="solid"/>
                     </a:lnL>
                     <a:lnR w="9525" cap="flat" cmpd="sng" algn="ctr">
                       <a:solidFill>
-                        <a:srgbClr val="2A476F"/>
+                        <a:srgbClr val="4981D0"/>
                       </a:solidFill>
                       <a:prstDash val="solid"/>
                     </a:lnR>
                     <a:lnT w="9525" cap="flat" cmpd="sng" algn="ctr">
                       <a:solidFill>
-                        <a:srgbClr val="2A476F"/>
+                        <a:srgbClr val="4981D0"/>
                       </a:solidFill>
                       <a:prstDash val="solid"/>
                     </a:lnT>
                     <a:lnB w="9525" cap="flat" cmpd="sng" algn="ctr">
                       <a:solidFill>
-                        <a:srgbClr val="2A476F"/>
+                        <a:srgbClr val="4981D0"/>
                       </a:solidFill>
                       <a:prstDash val="solid"/>
                     </a:lnB>
                     <a:solidFill>
-                      <a:srgbClr val="2A476F"/>
+                      <a:srgbClr val="4981D0"/>
                     </a:solidFill>
                   </a:tcPr>
                 </a:tc>
@@ -4031,30 +4031,30 @@
                   <a:tcPr anchor="ctr" marL="73152" marR="73152">
                     <a:lnL w="9525" cap="flat" cmpd="sng" algn="ctr">
                       <a:solidFill>
-                        <a:srgbClr val="2A476F"/>
+                        <a:srgbClr val="4981D0"/>
                       </a:solidFill>
                       <a:prstDash val="solid"/>
                     </a:lnL>
                     <a:lnR w="9525" cap="flat" cmpd="sng" algn="ctr">
                       <a:solidFill>
-                        <a:srgbClr val="2A476F"/>
+                        <a:srgbClr val="4981D0"/>
                       </a:solidFill>
                       <a:prstDash val="solid"/>
                     </a:lnR>
                     <a:lnT w="9525" cap="flat" cmpd="sng" algn="ctr">
                       <a:solidFill>
-                        <a:srgbClr val="2A476F"/>
+                        <a:srgbClr val="4981D0"/>
                       </a:solidFill>
                       <a:prstDash val="solid"/>
                     </a:lnT>
                     <a:lnB w="9525" cap="flat" cmpd="sng" algn="ctr">
                       <a:solidFill>
-                        <a:srgbClr val="2A476F"/>
+                        <a:srgbClr val="4981D0"/>
                       </a:solidFill>
                       <a:prstDash val="solid"/>
                     </a:lnB>
                     <a:solidFill>
-                      <a:srgbClr val="2A476F"/>
+                      <a:srgbClr val="4981D0"/>
                     </a:solidFill>
                   </a:tcPr>
                 </a:tc>
@@ -4077,30 +4077,30 @@
                   <a:tcPr anchor="ctr" marL="73152" marR="73152">
                     <a:lnL w="9525" cap="flat" cmpd="sng" algn="ctr">
                       <a:solidFill>
-                        <a:srgbClr val="2A476F"/>
+                        <a:srgbClr val="4981D0"/>
                       </a:solidFill>
                       <a:prstDash val="solid"/>
                     </a:lnL>
                     <a:lnR w="9525" cap="flat" cmpd="sng" algn="ctr">
                       <a:solidFill>
-                        <a:srgbClr val="2A476F"/>
+                        <a:srgbClr val="4981D0"/>
                       </a:solidFill>
                       <a:prstDash val="solid"/>
                     </a:lnR>
                     <a:lnT w="9525" cap="flat" cmpd="sng" algn="ctr">
                       <a:solidFill>
-                        <a:srgbClr val="2A476F"/>
+                        <a:srgbClr val="4981D0"/>
                       </a:solidFill>
                       <a:prstDash val="solid"/>
                     </a:lnT>
                     <a:lnB w="9525" cap="flat" cmpd="sng" algn="ctr">
                       <a:solidFill>
-                        <a:srgbClr val="2A476F"/>
+                        <a:srgbClr val="4981D0"/>
                       </a:solidFill>
                       <a:prstDash val="solid"/>
                     </a:lnB>
                     <a:solidFill>
-                      <a:srgbClr val="2A476F"/>
+                      <a:srgbClr val="4981D0"/>
                     </a:solidFill>
                   </a:tcPr>
                 </a:tc>
@@ -4115,7 +4115,7 @@
                       <a:r>
                         <a:rPr sz="1500" b="1">
                           <a:solidFill>
-                            <a:srgbClr val="16263B"/>
+                            <a:srgbClr val="1D4072"/>
                           </a:solidFill>
                         </a:rPr>
                         <a:t>00:00</a:t>
@@ -4125,30 +4125,30 @@
                   <a:tcPr anchor="ctr" marL="73152" marR="73152">
                     <a:lnL w="9525" cap="flat" cmpd="sng" algn="ctr">
                       <a:solidFill>
-                        <a:srgbClr val="D1DEF0"/>
+                        <a:srgbClr val="D4E3F7"/>
                       </a:solidFill>
                       <a:prstDash val="solid"/>
                     </a:lnL>
                     <a:lnR w="9525" cap="flat" cmpd="sng" algn="ctr">
                       <a:solidFill>
-                        <a:srgbClr val="D1DEF0"/>
+                        <a:srgbClr val="D4E3F7"/>
                       </a:solidFill>
                       <a:prstDash val="solid"/>
                     </a:lnR>
                     <a:lnT w="9525" cap="flat" cmpd="sng" algn="ctr">
                       <a:solidFill>
-                        <a:srgbClr val="D1DEF0"/>
+                        <a:srgbClr val="D4E3F7"/>
                       </a:solidFill>
                       <a:prstDash val="solid"/>
                     </a:lnT>
                     <a:lnB w="9525" cap="flat" cmpd="sng" algn="ctr">
                       <a:solidFill>
-                        <a:srgbClr val="D1DEF0"/>
+                        <a:srgbClr val="D4E3F7"/>
                       </a:solidFill>
                       <a:prstDash val="solid"/>
                     </a:lnB>
                     <a:solidFill>
-                      <a:srgbClr val="D1DEF0"/>
+                      <a:srgbClr val="D4E3F7"/>
                     </a:solidFill>
                   </a:tcPr>
                 </a:tc>
@@ -4171,25 +4171,25 @@
                   <a:tcPr anchor="ctr" marL="73152" marR="73152">
                     <a:lnL w="9525" cap="flat" cmpd="sng" algn="ctr">
                       <a:solidFill>
-                        <a:srgbClr val="D1DEF0"/>
+                        <a:srgbClr val="D4E3F7"/>
                       </a:solidFill>
                       <a:prstDash val="solid"/>
                     </a:lnL>
                     <a:lnR w="9525" cap="flat" cmpd="sng" algn="ctr">
                       <a:solidFill>
-                        <a:srgbClr val="D1DEF0"/>
+                        <a:srgbClr val="D4E3F7"/>
                       </a:solidFill>
                       <a:prstDash val="solid"/>
                     </a:lnR>
                     <a:lnT w="9525" cap="flat" cmpd="sng" algn="ctr">
                       <a:solidFill>
-                        <a:srgbClr val="D1DEF0"/>
+                        <a:srgbClr val="D4E3F7"/>
                       </a:solidFill>
                       <a:prstDash val="solid"/>
                     </a:lnT>
                     <a:lnB w="9525" cap="flat" cmpd="sng" algn="ctr">
                       <a:solidFill>
-                        <a:srgbClr val="D1DEF0"/>
+                        <a:srgbClr val="D4E3F7"/>
                       </a:solidFill>
                       <a:prstDash val="solid"/>
                     </a:lnB>
@@ -4217,25 +4217,25 @@
                   <a:tcPr anchor="ctr" marL="73152" marR="73152">
                     <a:lnL w="9525" cap="flat" cmpd="sng" algn="ctr">
                       <a:solidFill>
-                        <a:srgbClr val="D1DEF0"/>
+                        <a:srgbClr val="D4E3F7"/>
                       </a:solidFill>
                       <a:prstDash val="solid"/>
                     </a:lnL>
                     <a:lnR w="9525" cap="flat" cmpd="sng" algn="ctr">
                       <a:solidFill>
-                        <a:srgbClr val="D1DEF0"/>
+                        <a:srgbClr val="D4E3F7"/>
                       </a:solidFill>
                       <a:prstDash val="solid"/>
                     </a:lnR>
                     <a:lnT w="9525" cap="flat" cmpd="sng" algn="ctr">
                       <a:solidFill>
-                        <a:srgbClr val="D1DEF0"/>
+                        <a:srgbClr val="D4E3F7"/>
                       </a:solidFill>
                       <a:prstDash val="solid"/>
                     </a:lnT>
                     <a:lnB w="9525" cap="flat" cmpd="sng" algn="ctr">
                       <a:solidFill>
-                        <a:srgbClr val="D1DEF0"/>
+                        <a:srgbClr val="D4E3F7"/>
                       </a:solidFill>
                       <a:prstDash val="solid"/>
                     </a:lnB>
@@ -4255,7 +4255,7 @@
                       <a:r>
                         <a:rPr sz="1500" b="1">
                           <a:solidFill>
-                            <a:srgbClr val="16263B"/>
+                            <a:srgbClr val="1D4072"/>
                           </a:solidFill>
                         </a:rPr>
                         <a:t>00:00</a:t>
@@ -4265,30 +4265,30 @@
                   <a:tcPr anchor="ctr" marL="73152" marR="73152">
                     <a:lnL w="9525" cap="flat" cmpd="sng" algn="ctr">
                       <a:solidFill>
-                        <a:srgbClr val="D1DEF0"/>
+                        <a:srgbClr val="D4E3F7"/>
                       </a:solidFill>
                       <a:prstDash val="solid"/>
                     </a:lnL>
                     <a:lnR w="9525" cap="flat" cmpd="sng" algn="ctr">
                       <a:solidFill>
-                        <a:srgbClr val="D1DEF0"/>
+                        <a:srgbClr val="D4E3F7"/>
                       </a:solidFill>
                       <a:prstDash val="solid"/>
                     </a:lnR>
                     <a:lnT w="9525" cap="flat" cmpd="sng" algn="ctr">
                       <a:solidFill>
-                        <a:srgbClr val="D1DEF0"/>
+                        <a:srgbClr val="D4E3F7"/>
                       </a:solidFill>
                       <a:prstDash val="solid"/>
                     </a:lnT>
                     <a:lnB w="9525" cap="flat" cmpd="sng" algn="ctr">
                       <a:solidFill>
-                        <a:srgbClr val="D1DEF0"/>
+                        <a:srgbClr val="D4E3F7"/>
                       </a:solidFill>
                       <a:prstDash val="solid"/>
                     </a:lnB>
                     <a:solidFill>
-                      <a:srgbClr val="D1DEF0"/>
+                      <a:srgbClr val="D4E3F7"/>
                     </a:solidFill>
                   </a:tcPr>
                 </a:tc>
@@ -4311,30 +4311,30 @@
                   <a:tcPr anchor="ctr" marL="73152" marR="73152">
                     <a:lnL w="9525" cap="flat" cmpd="sng" algn="ctr">
                       <a:solidFill>
-                        <a:srgbClr val="D1DEF0"/>
+                        <a:srgbClr val="D4E3F7"/>
                       </a:solidFill>
                       <a:prstDash val="solid"/>
                     </a:lnL>
                     <a:lnR w="9525" cap="flat" cmpd="sng" algn="ctr">
                       <a:solidFill>
-                        <a:srgbClr val="D1DEF0"/>
+                        <a:srgbClr val="D4E3F7"/>
                       </a:solidFill>
                       <a:prstDash val="solid"/>
                     </a:lnR>
                     <a:lnT w="9525" cap="flat" cmpd="sng" algn="ctr">
                       <a:solidFill>
-                        <a:srgbClr val="D1DEF0"/>
+                        <a:srgbClr val="D4E3F7"/>
                       </a:solidFill>
                       <a:prstDash val="solid"/>
                     </a:lnT>
                     <a:lnB w="9525" cap="flat" cmpd="sng" algn="ctr">
                       <a:solidFill>
-                        <a:srgbClr val="D1DEF0"/>
+                        <a:srgbClr val="D4E3F7"/>
                       </a:solidFill>
                       <a:prstDash val="solid"/>
                     </a:lnB>
                     <a:solidFill>
-                      <a:srgbClr val="F0F4F9"/>
+                      <a:srgbClr val="F3F7FC"/>
                     </a:solidFill>
                   </a:tcPr>
                 </a:tc>
@@ -4357,30 +4357,30 @@
                   <a:tcPr anchor="ctr" marL="73152" marR="73152">
                     <a:lnL w="9525" cap="flat" cmpd="sng" algn="ctr">
                       <a:solidFill>
-                        <a:srgbClr val="D1DEF0"/>
+                        <a:srgbClr val="D4E3F7"/>
                       </a:solidFill>
                       <a:prstDash val="solid"/>
                     </a:lnL>
                     <a:lnR w="9525" cap="flat" cmpd="sng" algn="ctr">
                       <a:solidFill>
-                        <a:srgbClr val="D1DEF0"/>
+                        <a:srgbClr val="D4E3F7"/>
                       </a:solidFill>
                       <a:prstDash val="solid"/>
                     </a:lnR>
                     <a:lnT w="9525" cap="flat" cmpd="sng" algn="ctr">
                       <a:solidFill>
-                        <a:srgbClr val="D1DEF0"/>
+                        <a:srgbClr val="D4E3F7"/>
                       </a:solidFill>
                       <a:prstDash val="solid"/>
                     </a:lnT>
                     <a:lnB w="9525" cap="flat" cmpd="sng" algn="ctr">
                       <a:solidFill>
-                        <a:srgbClr val="D1DEF0"/>
+                        <a:srgbClr val="D4E3F7"/>
                       </a:solidFill>
                       <a:prstDash val="solid"/>
                     </a:lnB>
                     <a:solidFill>
-                      <a:srgbClr val="F0F4F9"/>
+                      <a:srgbClr val="F3F7FC"/>
                     </a:solidFill>
                   </a:tcPr>
                 </a:tc>
@@ -4395,7 +4395,7 @@
                       <a:r>
                         <a:rPr sz="1500" b="1">
                           <a:solidFill>
-                            <a:srgbClr val="16263B"/>
+                            <a:srgbClr val="1D4072"/>
                           </a:solidFill>
                         </a:rPr>
                         <a:t>00:00</a:t>
@@ -4405,30 +4405,30 @@
                   <a:tcPr anchor="ctr" marL="73152" marR="73152">
                     <a:lnL w="9525" cap="flat" cmpd="sng" algn="ctr">
                       <a:solidFill>
-                        <a:srgbClr val="D1DEF0"/>
+                        <a:srgbClr val="D4E3F7"/>
                       </a:solidFill>
                       <a:prstDash val="solid"/>
                     </a:lnL>
                     <a:lnR w="9525" cap="flat" cmpd="sng" algn="ctr">
                       <a:solidFill>
-                        <a:srgbClr val="D1DEF0"/>
+                        <a:srgbClr val="D4E3F7"/>
                       </a:solidFill>
                       <a:prstDash val="solid"/>
                     </a:lnR>
                     <a:lnT w="9525" cap="flat" cmpd="sng" algn="ctr">
                       <a:solidFill>
-                        <a:srgbClr val="D1DEF0"/>
+                        <a:srgbClr val="D4E3F7"/>
                       </a:solidFill>
                       <a:prstDash val="solid"/>
                     </a:lnT>
                     <a:lnB w="9525" cap="flat" cmpd="sng" algn="ctr">
                       <a:solidFill>
-                        <a:srgbClr val="D1DEF0"/>
+                        <a:srgbClr val="D4E3F7"/>
                       </a:solidFill>
                       <a:prstDash val="solid"/>
                     </a:lnB>
                     <a:solidFill>
-                      <a:srgbClr val="D1DEF0"/>
+                      <a:srgbClr val="D4E3F7"/>
                     </a:solidFill>
                   </a:tcPr>
                 </a:tc>
@@ -4451,25 +4451,25 @@
                   <a:tcPr anchor="ctr" marL="73152" marR="73152">
                     <a:lnL w="9525" cap="flat" cmpd="sng" algn="ctr">
                       <a:solidFill>
-                        <a:srgbClr val="D1DEF0"/>
+                        <a:srgbClr val="D4E3F7"/>
                       </a:solidFill>
                       <a:prstDash val="solid"/>
                     </a:lnL>
                     <a:lnR w="9525" cap="flat" cmpd="sng" algn="ctr">
                       <a:solidFill>
-                        <a:srgbClr val="D1DEF0"/>
+                        <a:srgbClr val="D4E3F7"/>
                       </a:solidFill>
                       <a:prstDash val="solid"/>
                     </a:lnR>
                     <a:lnT w="9525" cap="flat" cmpd="sng" algn="ctr">
                       <a:solidFill>
-                        <a:srgbClr val="D1DEF0"/>
+                        <a:srgbClr val="D4E3F7"/>
                       </a:solidFill>
                       <a:prstDash val="solid"/>
                     </a:lnT>
                     <a:lnB w="9525" cap="flat" cmpd="sng" algn="ctr">
                       <a:solidFill>
-                        <a:srgbClr val="D1DEF0"/>
+                        <a:srgbClr val="D4E3F7"/>
                       </a:solidFill>
                       <a:prstDash val="solid"/>
                     </a:lnB>
@@ -4497,25 +4497,25 @@
                   <a:tcPr anchor="ctr" marL="73152" marR="73152">
                     <a:lnL w="9525" cap="flat" cmpd="sng" algn="ctr">
                       <a:solidFill>
-                        <a:srgbClr val="D1DEF0"/>
+                        <a:srgbClr val="D4E3F7"/>
                       </a:solidFill>
                       <a:prstDash val="solid"/>
                     </a:lnL>
                     <a:lnR w="9525" cap="flat" cmpd="sng" algn="ctr">
                       <a:solidFill>
-                        <a:srgbClr val="D1DEF0"/>
+                        <a:srgbClr val="D4E3F7"/>
                       </a:solidFill>
                       <a:prstDash val="solid"/>
                     </a:lnR>
                     <a:lnT w="9525" cap="flat" cmpd="sng" algn="ctr">
                       <a:solidFill>
-                        <a:srgbClr val="D1DEF0"/>
+                        <a:srgbClr val="D4E3F7"/>
                       </a:solidFill>
                       <a:prstDash val="solid"/>
                     </a:lnT>
                     <a:lnB w="9525" cap="flat" cmpd="sng" algn="ctr">
                       <a:solidFill>
-                        <a:srgbClr val="D1DEF0"/>
+                        <a:srgbClr val="D4E3F7"/>
                       </a:solidFill>
                       <a:prstDash val="solid"/>
                     </a:lnB>
@@ -4535,7 +4535,7 @@
                       <a:r>
                         <a:rPr sz="1500" b="1">
                           <a:solidFill>
-                            <a:srgbClr val="16263B"/>
+                            <a:srgbClr val="1D4072"/>
                           </a:solidFill>
                         </a:rPr>
                         <a:t>00:00</a:t>
@@ -4545,30 +4545,30 @@
                   <a:tcPr anchor="ctr" marL="73152" marR="73152">
                     <a:lnL w="9525" cap="flat" cmpd="sng" algn="ctr">
                       <a:solidFill>
-                        <a:srgbClr val="D1DEF0"/>
+                        <a:srgbClr val="D4E3F7"/>
                       </a:solidFill>
                       <a:prstDash val="solid"/>
                     </a:lnL>
                     <a:lnR w="9525" cap="flat" cmpd="sng" algn="ctr">
                       <a:solidFill>
-                        <a:srgbClr val="D1DEF0"/>
+                        <a:srgbClr val="D4E3F7"/>
                       </a:solidFill>
                       <a:prstDash val="solid"/>
                     </a:lnR>
                     <a:lnT w="9525" cap="flat" cmpd="sng" algn="ctr">
                       <a:solidFill>
-                        <a:srgbClr val="D1DEF0"/>
+                        <a:srgbClr val="D4E3F7"/>
                       </a:solidFill>
                       <a:prstDash val="solid"/>
                     </a:lnT>
                     <a:lnB w="9525" cap="flat" cmpd="sng" algn="ctr">
                       <a:solidFill>
-                        <a:srgbClr val="D1DEF0"/>
+                        <a:srgbClr val="D4E3F7"/>
                       </a:solidFill>
                       <a:prstDash val="solid"/>
                     </a:lnB>
                     <a:solidFill>
-                      <a:srgbClr val="D1DEF0"/>
+                      <a:srgbClr val="D4E3F7"/>
                     </a:solidFill>
                   </a:tcPr>
                 </a:tc>
@@ -4591,30 +4591,30 @@
                   <a:tcPr anchor="ctr" marL="73152" marR="73152">
                     <a:lnL w="9525" cap="flat" cmpd="sng" algn="ctr">
                       <a:solidFill>
-                        <a:srgbClr val="D1DEF0"/>
+                        <a:srgbClr val="D4E3F7"/>
                       </a:solidFill>
                       <a:prstDash val="solid"/>
                     </a:lnL>
                     <a:lnR w="9525" cap="flat" cmpd="sng" algn="ctr">
                       <a:solidFill>
-                        <a:srgbClr val="D1DEF0"/>
+                        <a:srgbClr val="D4E3F7"/>
                       </a:solidFill>
                       <a:prstDash val="solid"/>
                     </a:lnR>
                     <a:lnT w="9525" cap="flat" cmpd="sng" algn="ctr">
                       <a:solidFill>
-                        <a:srgbClr val="D1DEF0"/>
+                        <a:srgbClr val="D4E3F7"/>
                       </a:solidFill>
                       <a:prstDash val="solid"/>
                     </a:lnT>
                     <a:lnB w="9525" cap="flat" cmpd="sng" algn="ctr">
                       <a:solidFill>
-                        <a:srgbClr val="D1DEF0"/>
+                        <a:srgbClr val="D4E3F7"/>
                       </a:solidFill>
                       <a:prstDash val="solid"/>
                     </a:lnB>
                     <a:solidFill>
-                      <a:srgbClr val="F0F4F9"/>
+                      <a:srgbClr val="F3F7FC"/>
                     </a:solidFill>
                   </a:tcPr>
                 </a:tc>
@@ -4637,30 +4637,30 @@
                   <a:tcPr anchor="ctr" marL="73152" marR="73152">
                     <a:lnL w="9525" cap="flat" cmpd="sng" algn="ctr">
                       <a:solidFill>
-                        <a:srgbClr val="D1DEF0"/>
+                        <a:srgbClr val="D4E3F7"/>
                       </a:solidFill>
                       <a:prstDash val="solid"/>
                     </a:lnL>
                     <a:lnR w="9525" cap="flat" cmpd="sng" algn="ctr">
                       <a:solidFill>
-                        <a:srgbClr val="D1DEF0"/>
+                        <a:srgbClr val="D4E3F7"/>
                       </a:solidFill>
                       <a:prstDash val="solid"/>
                     </a:lnR>
                     <a:lnT w="9525" cap="flat" cmpd="sng" algn="ctr">
                       <a:solidFill>
-                        <a:srgbClr val="D1DEF0"/>
+                        <a:srgbClr val="D4E3F7"/>
                       </a:solidFill>
                       <a:prstDash val="solid"/>
                     </a:lnT>
                     <a:lnB w="9525" cap="flat" cmpd="sng" algn="ctr">
                       <a:solidFill>
-                        <a:srgbClr val="D1DEF0"/>
+                        <a:srgbClr val="D4E3F7"/>
                       </a:solidFill>
                       <a:prstDash val="solid"/>
                     </a:lnB>
                     <a:solidFill>
-                      <a:srgbClr val="F0F4F9"/>
+                      <a:srgbClr val="F3F7FC"/>
                     </a:solidFill>
                   </a:tcPr>
                 </a:tc>
@@ -4675,7 +4675,7 @@
                       <a:r>
                         <a:rPr sz="1500" b="1">
                           <a:solidFill>
-                            <a:srgbClr val="16263B"/>
+                            <a:srgbClr val="1D4072"/>
                           </a:solidFill>
                         </a:rPr>
                         <a:t>00:00</a:t>
@@ -4685,30 +4685,30 @@
                   <a:tcPr anchor="ctr" marL="73152" marR="73152">
                     <a:lnL w="9525" cap="flat" cmpd="sng" algn="ctr">
                       <a:solidFill>
-                        <a:srgbClr val="D1DEF0"/>
+                        <a:srgbClr val="D4E3F7"/>
                       </a:solidFill>
                       <a:prstDash val="solid"/>
                     </a:lnL>
                     <a:lnR w="9525" cap="flat" cmpd="sng" algn="ctr">
                       <a:solidFill>
-                        <a:srgbClr val="D1DEF0"/>
+                        <a:srgbClr val="D4E3F7"/>
                       </a:solidFill>
                       <a:prstDash val="solid"/>
                     </a:lnR>
                     <a:lnT w="9525" cap="flat" cmpd="sng" algn="ctr">
                       <a:solidFill>
-                        <a:srgbClr val="D1DEF0"/>
+                        <a:srgbClr val="D4E3F7"/>
                       </a:solidFill>
                       <a:prstDash val="solid"/>
                     </a:lnT>
                     <a:lnB w="9525" cap="flat" cmpd="sng" algn="ctr">
                       <a:solidFill>
-                        <a:srgbClr val="D1DEF0"/>
+                        <a:srgbClr val="D4E3F7"/>
                       </a:solidFill>
                       <a:prstDash val="solid"/>
                     </a:lnB>
                     <a:solidFill>
-                      <a:srgbClr val="D1DEF0"/>
+                      <a:srgbClr val="D4E3F7"/>
                     </a:solidFill>
                   </a:tcPr>
                 </a:tc>
@@ -4731,25 +4731,25 @@
                   <a:tcPr anchor="ctr" marL="73152" marR="73152">
                     <a:lnL w="9525" cap="flat" cmpd="sng" algn="ctr">
                       <a:solidFill>
-                        <a:srgbClr val="D1DEF0"/>
+                        <a:srgbClr val="D4E3F7"/>
                       </a:solidFill>
                       <a:prstDash val="solid"/>
                     </a:lnL>
                     <a:lnR w="9525" cap="flat" cmpd="sng" algn="ctr">
                       <a:solidFill>
-                        <a:srgbClr val="D1DEF0"/>
+                        <a:srgbClr val="D4E3F7"/>
                       </a:solidFill>
                       <a:prstDash val="solid"/>
                     </a:lnR>
                     <a:lnT w="9525" cap="flat" cmpd="sng" algn="ctr">
                       <a:solidFill>
-                        <a:srgbClr val="D1DEF0"/>
+                        <a:srgbClr val="D4E3F7"/>
                       </a:solidFill>
                       <a:prstDash val="solid"/>
                     </a:lnT>
                     <a:lnB w="9525" cap="flat" cmpd="sng" algn="ctr">
                       <a:solidFill>
-                        <a:srgbClr val="D1DEF0"/>
+                        <a:srgbClr val="D4E3F7"/>
                       </a:solidFill>
                       <a:prstDash val="solid"/>
                     </a:lnB>
@@ -4777,25 +4777,25 @@
                   <a:tcPr anchor="ctr" marL="73152" marR="73152">
                     <a:lnL w="9525" cap="flat" cmpd="sng" algn="ctr">
                       <a:solidFill>
-                        <a:srgbClr val="D1DEF0"/>
+                        <a:srgbClr val="D4E3F7"/>
                       </a:solidFill>
                       <a:prstDash val="solid"/>
                     </a:lnL>
                     <a:lnR w="9525" cap="flat" cmpd="sng" algn="ctr">
                       <a:solidFill>
-                        <a:srgbClr val="D1DEF0"/>
+                        <a:srgbClr val="D4E3F7"/>
                       </a:solidFill>
                       <a:prstDash val="solid"/>
                     </a:lnR>
                     <a:lnT w="9525" cap="flat" cmpd="sng" algn="ctr">
                       <a:solidFill>
-                        <a:srgbClr val="D1DEF0"/>
+                        <a:srgbClr val="D4E3F7"/>
                       </a:solidFill>
                       <a:prstDash val="solid"/>
                     </a:lnT>
                     <a:lnB w="9525" cap="flat" cmpd="sng" algn="ctr">
                       <a:solidFill>
-                        <a:srgbClr val="D1DEF0"/>
+                        <a:srgbClr val="D4E3F7"/>
                       </a:solidFill>
                       <a:prstDash val="solid"/>
                     </a:lnB>
@@ -4823,7 +4823,7 @@
     <p:bg>
       <p:bgPr>
         <a:solidFill>
-          <a:srgbClr val="F0F4F9"/>
+          <a:srgbClr val="F3F7FC"/>
         </a:solidFill>
         <a:effectLst/>
       </p:bgPr>
@@ -4853,7 +4853,7 @@
             </a:avLst>
           </a:prstGeom>
           <a:solidFill>
-            <a:srgbClr val="D1DEF0"/>
+            <a:srgbClr val="D4E3F7"/>
           </a:solidFill>
           <a:ln>
             <a:noFill/>
@@ -4897,7 +4897,7 @@
             <a:r>
               <a:rPr sz="3000" b="1" i="0">
                 <a:solidFill>
-                  <a:srgbClr val="16263B"/>
+                  <a:srgbClr val="1D4072"/>
                 </a:solidFill>
               </a:rPr>
               <a:t>하객 안내</a:t>
@@ -4922,11 +4922,11 @@
             </a:avLst>
           </a:prstGeom>
           <a:solidFill>
-            <a:srgbClr val="F0F4F9"/>
+            <a:srgbClr val="F3F7FC"/>
           </a:solidFill>
           <a:ln w="15875">
             <a:solidFill>
-              <a:srgbClr val="D1DEF0"/>
+              <a:srgbClr val="D4E3F7"/>
             </a:solidFill>
           </a:ln>
         </p:spPr>
@@ -4953,7 +4953,7 @@
             <a:avLst/>
           </a:prstGeom>
           <a:solidFill>
-            <a:srgbClr val="2A476F"/>
+            <a:srgbClr val="4981D0"/>
           </a:solidFill>
           <a:ln>
             <a:noFill/>
@@ -5011,7 +5011,7 @@
             <a:r>
               <a:rPr sz="1800" b="1" i="0">
                 <a:solidFill>
-                  <a:srgbClr val="16263B"/>
+                  <a:srgbClr val="1D4072"/>
                 </a:solidFill>
               </a:rPr>
               <a:t>주차 안내</a:t>
@@ -5074,11 +5074,11 @@
             </a:avLst>
           </a:prstGeom>
           <a:solidFill>
-            <a:srgbClr val="F0F4F9"/>
+            <a:srgbClr val="F3F7FC"/>
           </a:solidFill>
           <a:ln w="15875">
             <a:solidFill>
-              <a:srgbClr val="D1DEF0"/>
+              <a:srgbClr val="D4E3F7"/>
             </a:solidFill>
           </a:ln>
         </p:spPr>
@@ -5105,7 +5105,7 @@
             <a:avLst/>
           </a:prstGeom>
           <a:solidFill>
-            <a:srgbClr val="2A476F"/>
+            <a:srgbClr val="4981D0"/>
           </a:solidFill>
           <a:ln>
             <a:noFill/>
@@ -5163,7 +5163,7 @@
             <a:r>
               <a:rPr sz="1800" b="1" i="0">
                 <a:solidFill>
-                  <a:srgbClr val="16263B"/>
+                  <a:srgbClr val="1D4072"/>
                 </a:solidFill>
               </a:rPr>
               <a:t>식사 안내</a:t>
@@ -5226,11 +5226,11 @@
             </a:avLst>
           </a:prstGeom>
           <a:solidFill>
-            <a:srgbClr val="F0F4F9"/>
+            <a:srgbClr val="F3F7FC"/>
           </a:solidFill>
           <a:ln w="15875">
             <a:solidFill>
-              <a:srgbClr val="D1DEF0"/>
+              <a:srgbClr val="D4E3F7"/>
             </a:solidFill>
           </a:ln>
         </p:spPr>
@@ -5257,7 +5257,7 @@
             <a:avLst/>
           </a:prstGeom>
           <a:solidFill>
-            <a:srgbClr val="2A476F"/>
+            <a:srgbClr val="4981D0"/>
           </a:solidFill>
           <a:ln>
             <a:noFill/>
@@ -5315,7 +5315,7 @@
             <a:r>
               <a:rPr sz="1800" b="1" i="0">
                 <a:solidFill>
-                  <a:srgbClr val="16263B"/>
+                  <a:srgbClr val="1D4072"/>
                 </a:solidFill>
               </a:rPr>
               <a:t>기념 촬영</a:t>
@@ -5375,7 +5375,7 @@
     <p:bg>
       <p:bgPr>
         <a:solidFill>
-          <a:srgbClr val="F0F4F9"/>
+          <a:srgbClr val="F3F7FC"/>
         </a:solidFill>
         <a:effectLst/>
       </p:bgPr>
@@ -5405,7 +5405,7 @@
             </a:avLst>
           </a:prstGeom>
           <a:solidFill>
-            <a:srgbClr val="D1DEF0"/>
+            <a:srgbClr val="D4E3F7"/>
           </a:solidFill>
           <a:ln>
             <a:noFill/>
@@ -5449,7 +5449,7 @@
             <a:r>
               <a:rPr sz="3000" b="1" i="0">
                 <a:solidFill>
-                  <a:srgbClr val="16263B"/>
+                  <a:srgbClr val="1D4072"/>
                 </a:solidFill>
               </a:rPr>
               <a:t>웨딩 사진</a:t>
@@ -5474,11 +5474,11 @@
             </a:avLst>
           </a:prstGeom>
           <a:solidFill>
-            <a:srgbClr val="D1DEF0"/>
+            <a:srgbClr val="D4E3F7"/>
           </a:solidFill>
           <a:ln w="19050">
             <a:solidFill>
-              <a:srgbClr val="2A476F"/>
+              <a:srgbClr val="4981D0"/>
             </a:solidFill>
             <a:prstDash val="dash"/>
           </a:ln>
@@ -5497,7 +5497,7 @@
             <a:r>
               <a:rPr sz="1200" b="0" i="0">
                 <a:solidFill>
-                  <a:srgbClr val="16263B"/>
+                  <a:srgbClr val="1D4072"/>
                 </a:solidFill>
               </a:rPr>
               <a:t>사진 1</a:t>
@@ -5522,11 +5522,11 @@
             </a:avLst>
           </a:prstGeom>
           <a:solidFill>
-            <a:srgbClr val="D1DEF0"/>
+            <a:srgbClr val="D4E3F7"/>
           </a:solidFill>
           <a:ln w="19050">
             <a:solidFill>
-              <a:srgbClr val="2A476F"/>
+              <a:srgbClr val="4981D0"/>
             </a:solidFill>
             <a:prstDash val="dash"/>
           </a:ln>
@@ -5545,7 +5545,7 @@
             <a:r>
               <a:rPr sz="1200" b="0" i="0">
                 <a:solidFill>
-                  <a:srgbClr val="16263B"/>
+                  <a:srgbClr val="1D4072"/>
                 </a:solidFill>
               </a:rPr>
               <a:t>사진 2</a:t>
@@ -5570,11 +5570,11 @@
             </a:avLst>
           </a:prstGeom>
           <a:solidFill>
-            <a:srgbClr val="D1DEF0"/>
+            <a:srgbClr val="D4E3F7"/>
           </a:solidFill>
           <a:ln w="19050">
             <a:solidFill>
-              <a:srgbClr val="2A476F"/>
+              <a:srgbClr val="4981D0"/>
             </a:solidFill>
             <a:prstDash val="dash"/>
           </a:ln>
@@ -5593,7 +5593,7 @@
             <a:r>
               <a:rPr sz="1200" b="0" i="0">
                 <a:solidFill>
-                  <a:srgbClr val="16263B"/>
+                  <a:srgbClr val="1D4072"/>
                 </a:solidFill>
               </a:rPr>
               <a:t>사진 3</a:t>
@@ -5618,11 +5618,11 @@
             </a:avLst>
           </a:prstGeom>
           <a:solidFill>
-            <a:srgbClr val="D1DEF0"/>
+            <a:srgbClr val="D4E3F7"/>
           </a:solidFill>
           <a:ln w="19050">
             <a:solidFill>
-              <a:srgbClr val="2A476F"/>
+              <a:srgbClr val="4981D0"/>
             </a:solidFill>
             <a:prstDash val="dash"/>
           </a:ln>
@@ -5641,7 +5641,7 @@
             <a:r>
               <a:rPr sz="1200" b="0" i="0">
                 <a:solidFill>
-                  <a:srgbClr val="16263B"/>
+                  <a:srgbClr val="1D4072"/>
                 </a:solidFill>
               </a:rPr>
               <a:t>사진 4</a:t>
@@ -5666,11 +5666,11 @@
             </a:avLst>
           </a:prstGeom>
           <a:solidFill>
-            <a:srgbClr val="D1DEF0"/>
+            <a:srgbClr val="D4E3F7"/>
           </a:solidFill>
           <a:ln w="19050">
             <a:solidFill>
-              <a:srgbClr val="2A476F"/>
+              <a:srgbClr val="4981D0"/>
             </a:solidFill>
             <a:prstDash val="dash"/>
           </a:ln>
@@ -5689,7 +5689,7 @@
             <a:r>
               <a:rPr sz="1200" b="0" i="0">
                 <a:solidFill>
-                  <a:srgbClr val="16263B"/>
+                  <a:srgbClr val="1D4072"/>
                 </a:solidFill>
               </a:rPr>
               <a:t>사진 5</a:t>
@@ -5714,11 +5714,11 @@
             </a:avLst>
           </a:prstGeom>
           <a:solidFill>
-            <a:srgbClr val="D1DEF0"/>
+            <a:srgbClr val="D4E3F7"/>
           </a:solidFill>
           <a:ln w="19050">
             <a:solidFill>
-              <a:srgbClr val="2A476F"/>
+              <a:srgbClr val="4981D0"/>
             </a:solidFill>
             <a:prstDash val="dash"/>
           </a:ln>
@@ -5737,7 +5737,7 @@
             <a:r>
               <a:rPr sz="1200" b="0" i="0">
                 <a:solidFill>
-                  <a:srgbClr val="16263B"/>
+                  <a:srgbClr val="1D4072"/>
                 </a:solidFill>
               </a:rPr>
               <a:t>사진 6</a:t>
@@ -5817,7 +5817,7 @@
             <a:r>
               <a:rPr sz="3400" b="1" i="0">
                 <a:solidFill>
-                  <a:srgbClr val="16263B"/>
+                  <a:srgbClr val="1D4072"/>
                 </a:solidFill>
               </a:rPr>
               <a:t>와 주셔서 고맙습니다</a:t>
@@ -5855,7 +5855,7 @@
             <a:r>
               <a:rPr sz="1700" b="0" i="1">
                 <a:solidFill>
-                  <a:srgbClr val="16263B"/>
+                  <a:srgbClr val="1D4072"/>
                 </a:solidFill>
               </a:rPr>
               <a:t>잘 살겠습니다</a:t>
@@ -5920,34 +5920,34 @@
         <a:sysClr val="window" lastClr="FFFFFF"/>
       </a:lt1>
       <a:dk2>
-        <a:srgbClr val="16263B"/>
+        <a:srgbClr val="1D4072"/>
       </a:dk2>
       <a:lt2>
-        <a:srgbClr val="F0F4F9"/>
+        <a:srgbClr val="F3F7FC"/>
       </a:lt2>
       <a:accent1>
-        <a:srgbClr val="2A476F"/>
+        <a:srgbClr val="4981D0"/>
       </a:accent1>
       <a:accent2>
-        <a:srgbClr val="91423B"/>
+        <a:srgbClr val="339941"/>
       </a:accent2>
       <a:accent3>
-        <a:srgbClr val="16263B"/>
+        <a:srgbClr val="1D4072"/>
       </a:accent3>
       <a:accent4>
-        <a:srgbClr val="D1DEF0"/>
+        <a:srgbClr val="D4E3F7"/>
       </a:accent4>
       <a:accent5>
-        <a:srgbClr val="5E4455"/>
+        <a:srgbClr val="3E8D88"/>
       </a:accent5>
       <a:accent6>
-        <a:srgbClr val="737D89"/>
+        <a:srgbClr val="778CAA"/>
       </a:accent6>
       <a:hlink>
-        <a:srgbClr val="2A476F"/>
+        <a:srgbClr val="4981D0"/>
       </a:hlink>
       <a:folHlink>
-        <a:srgbClr val="16263B"/>
+        <a:srgbClr val="1D4072"/>
       </a:folHlink>
     </a:clrScheme>
     <a:fontScheme name="Office">

--- a/public/fun/pack/pptx/wedding/결혼식_08_식순중심_처마밑제비집.pptx
+++ b/public/fun/pack/pptx/wedding/결혼식_08_식순중심_처마밑제비집.pptx
@@ -3286,6 +3286,14 @@
 <file path=ppt/slides/slide1.xml><?xml version="1.0" encoding="utf-8"?>
 <p:sld xmlns:a="http://schemas.openxmlformats.org/drawingml/2006/main" xmlns:p="http://schemas.openxmlformats.org/presentationml/2006/main" xmlns:r="http://schemas.openxmlformats.org/officeDocument/2006/relationships">
   <p:cSld>
+    <p:bg>
+      <p:bgPr>
+        <a:solidFill>
+          <a:srgbClr val="EAF2FD"/>
+        </a:solidFill>
+        <a:effectLst/>
+      </p:bgPr>
+    </p:bg>
     <p:spTree>
       <p:nvGrpSpPr>
         <p:cNvPr id="1" name=""/>
@@ -3293,30 +3301,120 @@
         <p:nvPr/>
       </p:nvGrpSpPr>
       <p:grpSpPr/>
-      <p:pic>
-        <p:nvPicPr>
-          <p:cNvPr id="3" name="표지 그림" descr="wedding-08.jpg"/>
-          <p:cNvPicPr>
-            <a:picLocks noChangeAspect="1"/>
-          </p:cNvPicPr>
+      <p:sp>
+        <p:nvSpPr>
+          <p:cNvPr id="3" name="사진 자리"/>
+          <p:cNvSpPr/>
           <p:nvPr/>
-        </p:nvPicPr>
-        <p:blipFill>
-          <a:blip r:embed="rId2"/>
-          <a:stretch>
-            <a:fillRect/>
-          </a:stretch>
-        </p:blipFill>
-        <p:spPr>
-          <a:xfrm>
-            <a:off x="0" y="0"/>
-            <a:ext cx="12191695" cy="6858000"/>
+        </p:nvSpPr>
+        <p:spPr>
+          <a:xfrm>
+            <a:off x="7071183" y="960120"/>
+            <a:ext cx="3657508" cy="4526280"/>
+          </a:xfrm>
+          <a:prstGeom prst="roundRect">
+            <a:avLst>
+              <a:gd name="adj" fmla="val 4000"/>
+            </a:avLst>
+          </a:prstGeom>
+          <a:solidFill>
+            <a:srgbClr val="A6C6F2"/>
+          </a:solidFill>
+          <a:ln>
+            <a:noFill/>
+          </a:ln>
+        </p:spPr>
+        <p:txBody>
+          <a:bodyPr rtlCol="0" anchor="ctr" wrap="square" lIns="54864" rIns="54864" tIns="27432" bIns="27432">
+            <a:noAutofit/>
+          </a:bodyPr>
+          <a:lstStyle/>
+          <a:p>
+            <a:pPr algn="ctr">
+              <a:lnSpc>
+                <a:spcPct val="100000"/>
+              </a:lnSpc>
+            </a:pPr>
+            <a:r>
+              <a:rPr sz="1400" b="0" i="0">
+                <a:solidFill>
+                  <a:srgbClr val="273549"/>
+                </a:solidFill>
+              </a:rPr>
+              <a:t>사진을 넣어 주세요</a:t>
+            </a:r>
+          </a:p>
+        </p:txBody>
+      </p:sp>
+      <p:sp>
+        <p:nvSpPr>
+          <p:cNvPr id="4" name="장식"/>
+          <p:cNvSpPr/>
+          <p:nvPr/>
+        </p:nvSpPr>
+        <p:spPr>
+          <a:xfrm>
+            <a:off x="7558851" y="1234439"/>
+            <a:ext cx="3657508" cy="4526280"/>
+          </a:xfrm>
+          <a:prstGeom prst="roundRect">
+            <a:avLst>
+              <a:gd name="adj" fmla="val 4000"/>
+            </a:avLst>
+          </a:prstGeom>
+          <a:noFill/>
+          <a:ln w="9525">
+            <a:solidFill>
+              <a:srgbClr val="26231F"/>
+            </a:solidFill>
+          </a:ln>
+        </p:spPr>
+        <p:txBody>
+          <a:bodyPr rtlCol="0" anchor="ctr"/>
+          <a:lstStyle/>
+          <a:p>
+            <a:pPr algn="ctr"/>
+          </a:p>
+        </p:txBody>
+      </p:sp>
+      <p:sp>
+        <p:nvSpPr>
+          <p:cNvPr id="5" name="라벨"/>
+          <p:cNvSpPr txBox="1"/>
+          <p:nvPr/>
+        </p:nvSpPr>
+        <p:spPr>
+          <a:xfrm>
+            <a:off x="822960" y="2148840"/>
+            <a:ext cx="5608179" cy="274320"/>
           </a:xfrm>
           <a:prstGeom prst="rect">
             <a:avLst/>
           </a:prstGeom>
-        </p:spPr>
-      </p:pic>
+          <a:noFill/>
+        </p:spPr>
+        <p:txBody>
+          <a:bodyPr wrap="square" lIns="54864" rIns="54864" tIns="27432" bIns="27432" anchor="t">
+            <a:noAutofit/>
+          </a:bodyPr>
+          <a:lstStyle/>
+          <a:p>
+            <a:pPr algn="l">
+              <a:lnSpc>
+                <a:spcPct val="115000"/>
+              </a:lnSpc>
+            </a:pPr>
+            <a:r>
+              <a:rPr sz="1000" b="1" i="0" spc="250">
+                <a:solidFill>
+                  <a:srgbClr val="26231F"/>
+                </a:solidFill>
+              </a:rPr>
+              <a:t>WEDDING</a:t>
+            </a:r>
+          </a:p>
+        </p:txBody>
+      </p:sp>
       <p:sp>
         <p:nvSpPr>
           <p:cNvPr id="2" name="Title 1"/>
@@ -3329,8 +3427,8 @@
         </p:nvSpPr>
         <p:spPr>
           <a:xfrm>
-            <a:off x="853418" y="2057400"/>
-            <a:ext cx="6095847" cy="1554480"/>
+            <a:off x="822960" y="2606040"/>
+            <a:ext cx="5608179" cy="1188720"/>
           </a:xfrm>
         </p:spPr>
         <p:txBody>
@@ -3347,7 +3445,7 @@
             <a:r>
               <a:rPr sz="3600" b="1" i="0">
                 <a:solidFill>
-                  <a:srgbClr val="1D4072"/>
+                  <a:srgbClr val="26231F"/>
                 </a:solidFill>
               </a:rPr>
               <a:t>저희 결혼합니다</a:t>
@@ -3357,14 +3455,14 @@
       </p:sp>
       <p:sp>
         <p:nvSpPr>
-          <p:cNvPr id="4" name="한 줄 문구"/>
+          <p:cNvPr id="6" name="한 줄 문구"/>
           <p:cNvSpPr txBox="1"/>
           <p:nvPr/>
         </p:nvSpPr>
         <p:spPr>
           <a:xfrm>
-            <a:off x="853418" y="3749039"/>
-            <a:ext cx="6095847" cy="822960"/>
+            <a:off x="822960" y="3886200"/>
+            <a:ext cx="5608179" cy="822960"/>
           </a:xfrm>
           <a:prstGeom prst="rect">
             <a:avLst/>
@@ -3383,9 +3481,9 @@
               </a:lnSpc>
             </a:pPr>
             <a:r>
-              <a:rPr sz="1700" b="0" i="1">
+              <a:rPr sz="1700" b="0" i="0">
                 <a:solidFill>
-                  <a:srgbClr val="1D4072"/>
+                  <a:srgbClr val="26231F"/>
                 </a:solidFill>
               </a:rPr>
               <a:t>신랑 신부 입장으로 시작합니다</a:t>
@@ -3395,14 +3493,14 @@
       </p:sp>
       <p:sp>
         <p:nvSpPr>
-          <p:cNvPr id="5" name="안내 문구"/>
+          <p:cNvPr id="7" name="안내 문구"/>
           <p:cNvSpPr txBox="1"/>
           <p:nvPr/>
         </p:nvSpPr>
         <p:spPr>
           <a:xfrm>
-            <a:off x="853418" y="4617720"/>
-            <a:ext cx="6095847" cy="914400"/>
+            <a:off x="822960" y="4754880"/>
+            <a:ext cx="5608179" cy="914400"/>
           </a:xfrm>
           <a:prstGeom prst="rect">
             <a:avLst/>
@@ -3423,7 +3521,7 @@
             <a:r>
               <a:rPr sz="1400" b="0" i="0">
                 <a:solidFill>
-                  <a:srgbClr val="666666"/>
+                  <a:srgbClr val="26231F"/>
                 </a:solidFill>
               </a:rPr>
               <a:t>신랑 이름 ♥ 신부 이름</a:t>
@@ -3438,10 +3536,10 @@
             <a:r>
               <a:rPr sz="1400" b="0" i="0">
                 <a:solidFill>
-                  <a:srgbClr val="666666"/>
+                  <a:srgbClr val="26231F"/>
                 </a:solidFill>
               </a:rPr>
-              <a:t>2027. 00. 00 · 예식장 이름</a:t>
+              <a:t>날짜 입력 · 예식장 이름</a:t>
             </a:r>
           </a:p>
         </p:txBody>
@@ -3460,7 +3558,7 @@
     <p:bg>
       <p:bgPr>
         <a:solidFill>
-          <a:srgbClr val="F3F7FC"/>
+          <a:srgbClr val="FAFBFD"/>
         </a:solidFill>
         <a:effectLst/>
       </p:bgPr>
@@ -3479,18 +3577,17 @@
           <p:nvPr/>
         </p:nvSpPr>
         <p:spPr>
-          <a:xfrm rot="10800000">
-            <a:off x="10637215" y="0"/>
-            <a:ext cx="914400" cy="1554480"/>
-          </a:xfrm>
-          <a:prstGeom prst="round2SameRect">
+          <a:xfrm>
+            <a:off x="640080" y="566928"/>
+            <a:ext cx="64008" cy="868680"/>
+          </a:xfrm>
+          <a:prstGeom prst="roundRect">
             <a:avLst>
-              <a:gd name="adj1" fmla="val 50000"/>
-              <a:gd name="adj2" fmla="val 0"/>
+              <a:gd name="adj" fmla="val 50000"/>
             </a:avLst>
           </a:prstGeom>
           <a:solidFill>
-            <a:srgbClr val="D4E3F7"/>
+            <a:srgbClr val="97BBED"/>
           </a:solidFill>
           <a:ln>
             <a:noFill/>
@@ -3506,6 +3603,73 @@
       </p:sp>
       <p:sp>
         <p:nvSpPr>
+          <p:cNvPr id="4" name="상단 라벨"/>
+          <p:cNvSpPr txBox="1"/>
+          <p:nvPr/>
+        </p:nvSpPr>
+        <p:spPr>
+          <a:xfrm>
+            <a:off x="868680" y="274320"/>
+            <a:ext cx="5486400" cy="274320"/>
+          </a:xfrm>
+          <a:prstGeom prst="rect">
+            <a:avLst/>
+          </a:prstGeom>
+          <a:noFill/>
+        </p:spPr>
+        <p:txBody>
+          <a:bodyPr wrap="square" lIns="54864" rIns="54864" tIns="27432" bIns="27432" anchor="ctr">
+            <a:noAutofit/>
+          </a:bodyPr>
+          <a:lstStyle/>
+          <a:p>
+            <a:pPr algn="l">
+              <a:lnSpc>
+                <a:spcPct val="115000"/>
+              </a:lnSpc>
+            </a:pPr>
+            <a:r>
+              <a:rPr sz="900" b="1" i="0" spc="250">
+                <a:solidFill>
+                  <a:srgbClr val="8E8780"/>
+                </a:solidFill>
+              </a:rPr>
+              <a:t>WEDDING</a:t>
+            </a:r>
+          </a:p>
+        </p:txBody>
+      </p:sp>
+      <p:sp>
+        <p:nvSpPr>
+          <p:cNvPr id="5" name="포인트"/>
+          <p:cNvSpPr/>
+          <p:nvPr/>
+        </p:nvSpPr>
+        <p:spPr>
+          <a:xfrm>
+            <a:off x="11167567" y="667512"/>
+            <a:ext cx="310896" cy="310896"/>
+          </a:xfrm>
+          <a:prstGeom prst="moon">
+            <a:avLst/>
+          </a:prstGeom>
+          <a:solidFill>
+            <a:srgbClr val="A6C6F2"/>
+          </a:solidFill>
+          <a:ln>
+            <a:noFill/>
+          </a:ln>
+        </p:spPr>
+        <p:txBody>
+          <a:bodyPr rtlCol="0" anchor="ctr"/>
+          <a:lstStyle/>
+          <a:p>
+            <a:pPr algn="ctr"/>
+          </a:p>
+        </p:txBody>
+      </p:sp>
+      <p:sp>
+        <p:nvSpPr>
           <p:cNvPr id="2" name="Title 1"/>
           <p:cNvSpPr>
             <a:spLocks noGrp="1"/>
@@ -3516,8 +3680,8 @@
         </p:nvSpPr>
         <p:spPr>
           <a:xfrm>
-            <a:off x="640080" y="457200"/>
-            <a:ext cx="9722815" cy="868680"/>
+            <a:off x="868680" y="566928"/>
+            <a:ext cx="9448495" cy="868680"/>
           </a:xfrm>
         </p:spPr>
         <p:txBody>
@@ -3534,7 +3698,7 @@
             <a:r>
               <a:rPr sz="3000" b="1" i="0">
                 <a:solidFill>
-                  <a:srgbClr val="1D4072"/>
+                  <a:srgbClr val="26231F"/>
                 </a:solidFill>
               </a:rPr>
               <a:t>신랑 · 신부 소개</a:t>
@@ -3544,25 +3708,23 @@
       </p:sp>
       <p:sp>
         <p:nvSpPr>
-          <p:cNvPr id="4" name="사진 자리"/>
+          <p:cNvPr id="6" name="사진 자리"/>
           <p:cNvSpPr/>
           <p:nvPr/>
         </p:nvSpPr>
         <p:spPr>
           <a:xfrm>
-            <a:off x="1939213" y="1600200"/>
-            <a:ext cx="2400300" cy="2400300"/>
+            <a:off x="1996363" y="1783080"/>
+            <a:ext cx="2286000" cy="2286000"/>
           </a:xfrm>
           <a:prstGeom prst="ellipse">
             <a:avLst/>
           </a:prstGeom>
           <a:solidFill>
-            <a:srgbClr val="D4E3F7"/>
+            <a:srgbClr val="D1E2FA"/>
           </a:solidFill>
           <a:ln w="19050">
-            <a:solidFill>
-              <a:srgbClr val="4981D0"/>
-            </a:solidFill>
+            <a:noFill/>
             <a:prstDash val="dash"/>
           </a:ln>
         </p:spPr>
@@ -3580,7 +3742,7 @@
             <a:r>
               <a:rPr sz="1200" b="0" i="0">
                 <a:solidFill>
-                  <a:srgbClr val="1D4072"/>
+                  <a:srgbClr val="8E8780"/>
                 </a:solidFill>
               </a:rPr>
               <a:t>사진</a:t>
@@ -3590,13 +3752,13 @@
       </p:sp>
       <p:sp>
         <p:nvSpPr>
-          <p:cNvPr id="5" name="TextBox 4"/>
+          <p:cNvPr id="7" name="TextBox 6"/>
           <p:cNvSpPr txBox="1"/>
           <p:nvPr/>
         </p:nvSpPr>
         <p:spPr>
           <a:xfrm>
-            <a:off x="640080" y="4091939"/>
+            <a:off x="640080" y="4160520"/>
             <a:ext cx="4998567" cy="411480"/>
           </a:xfrm>
           <a:prstGeom prst="rect">
@@ -3618,7 +3780,7 @@
             <a:r>
               <a:rPr sz="1600" b="1" i="0">
                 <a:solidFill>
-                  <a:srgbClr val="1D4072"/>
+                  <a:srgbClr val="273549"/>
                 </a:solidFill>
               </a:rPr>
               <a:t>신랑</a:t>
@@ -3628,14 +3790,14 @@
       </p:sp>
       <p:sp>
         <p:nvSpPr>
-          <p:cNvPr id="6" name="TextBox 5"/>
+          <p:cNvPr id="8" name="TextBox 7"/>
           <p:cNvSpPr txBox="1"/>
           <p:nvPr/>
         </p:nvSpPr>
         <p:spPr>
           <a:xfrm>
-            <a:off x="731519" y="4549140"/>
-            <a:ext cx="4815687" cy="1851660"/>
+            <a:off x="731519" y="4617720"/>
+            <a:ext cx="4815687" cy="1737360"/>
           </a:xfrm>
           <a:prstGeom prst="rect">
             <a:avLst/>
@@ -3696,25 +3858,23 @@
       </p:sp>
       <p:sp>
         <p:nvSpPr>
-          <p:cNvPr id="7" name="사진 자리"/>
+          <p:cNvPr id="9" name="사진 자리"/>
           <p:cNvSpPr/>
           <p:nvPr/>
         </p:nvSpPr>
         <p:spPr>
           <a:xfrm>
-            <a:off x="7852181" y="1600200"/>
-            <a:ext cx="2400300" cy="2400300"/>
+            <a:off x="7909331" y="1783080"/>
+            <a:ext cx="2286000" cy="2286000"/>
           </a:xfrm>
           <a:prstGeom prst="ellipse">
             <a:avLst/>
           </a:prstGeom>
           <a:solidFill>
-            <a:srgbClr val="D4E3F7"/>
+            <a:srgbClr val="D1E2FA"/>
           </a:solidFill>
           <a:ln w="19050">
-            <a:solidFill>
-              <a:srgbClr val="4981D0"/>
-            </a:solidFill>
+            <a:noFill/>
             <a:prstDash val="dash"/>
           </a:ln>
         </p:spPr>
@@ -3732,7 +3892,7 @@
             <a:r>
               <a:rPr sz="1200" b="0" i="0">
                 <a:solidFill>
-                  <a:srgbClr val="1D4072"/>
+                  <a:srgbClr val="8E8780"/>
                 </a:solidFill>
               </a:rPr>
               <a:t>사진</a:t>
@@ -3742,13 +3902,13 @@
       </p:sp>
       <p:sp>
         <p:nvSpPr>
-          <p:cNvPr id="8" name="TextBox 7"/>
+          <p:cNvPr id="10" name="TextBox 9"/>
           <p:cNvSpPr txBox="1"/>
           <p:nvPr/>
         </p:nvSpPr>
         <p:spPr>
           <a:xfrm>
-            <a:off x="6553047" y="4091939"/>
+            <a:off x="6553047" y="4160520"/>
             <a:ext cx="4998567" cy="411480"/>
           </a:xfrm>
           <a:prstGeom prst="rect">
@@ -3770,7 +3930,7 @@
             <a:r>
               <a:rPr sz="1600" b="1" i="0">
                 <a:solidFill>
-                  <a:srgbClr val="1D4072"/>
+                  <a:srgbClr val="273549"/>
                 </a:solidFill>
               </a:rPr>
               <a:t>신부</a:t>
@@ -3780,14 +3940,14 @@
       </p:sp>
       <p:sp>
         <p:nvSpPr>
-          <p:cNvPr id="9" name="TextBox 8"/>
+          <p:cNvPr id="11" name="TextBox 10"/>
           <p:cNvSpPr txBox="1"/>
           <p:nvPr/>
         </p:nvSpPr>
         <p:spPr>
           <a:xfrm>
-            <a:off x="6644487" y="4549140"/>
-            <a:ext cx="4815687" cy="1851660"/>
+            <a:off x="6644487" y="4617720"/>
+            <a:ext cx="4815687" cy="1737360"/>
           </a:xfrm>
           <a:prstGeom prst="rect">
             <a:avLst/>
@@ -3860,7 +4020,7 @@
     <p:bg>
       <p:bgPr>
         <a:solidFill>
-          <a:srgbClr val="F3F7FC"/>
+          <a:srgbClr val="FAFBFD"/>
         </a:solidFill>
         <a:effectLst/>
       </p:bgPr>
@@ -3879,18 +4039,17 @@
           <p:nvPr/>
         </p:nvSpPr>
         <p:spPr>
-          <a:xfrm rot="10800000">
-            <a:off x="10637215" y="0"/>
-            <a:ext cx="914400" cy="1554480"/>
-          </a:xfrm>
-          <a:prstGeom prst="round2SameRect">
+          <a:xfrm>
+            <a:off x="640080" y="566928"/>
+            <a:ext cx="64008" cy="868680"/>
+          </a:xfrm>
+          <a:prstGeom prst="roundRect">
             <a:avLst>
-              <a:gd name="adj1" fmla="val 50000"/>
-              <a:gd name="adj2" fmla="val 0"/>
+              <a:gd name="adj" fmla="val 50000"/>
             </a:avLst>
           </a:prstGeom>
           <a:solidFill>
-            <a:srgbClr val="D4E3F7"/>
+            <a:srgbClr val="97BBED"/>
           </a:solidFill>
           <a:ln>
             <a:noFill/>
@@ -3906,6 +4065,73 @@
       </p:sp>
       <p:sp>
         <p:nvSpPr>
+          <p:cNvPr id="4" name="상단 라벨"/>
+          <p:cNvSpPr txBox="1"/>
+          <p:nvPr/>
+        </p:nvSpPr>
+        <p:spPr>
+          <a:xfrm>
+            <a:off x="868680" y="274320"/>
+            <a:ext cx="5486400" cy="274320"/>
+          </a:xfrm>
+          <a:prstGeom prst="rect">
+            <a:avLst/>
+          </a:prstGeom>
+          <a:noFill/>
+        </p:spPr>
+        <p:txBody>
+          <a:bodyPr wrap="square" lIns="54864" rIns="54864" tIns="27432" bIns="27432" anchor="ctr">
+            <a:noAutofit/>
+          </a:bodyPr>
+          <a:lstStyle/>
+          <a:p>
+            <a:pPr algn="l">
+              <a:lnSpc>
+                <a:spcPct val="115000"/>
+              </a:lnSpc>
+            </a:pPr>
+            <a:r>
+              <a:rPr sz="900" b="1" i="0" spc="250">
+                <a:solidFill>
+                  <a:srgbClr val="8E8780"/>
+                </a:solidFill>
+              </a:rPr>
+              <a:t>WEDDING</a:t>
+            </a:r>
+          </a:p>
+        </p:txBody>
+      </p:sp>
+      <p:sp>
+        <p:nvSpPr>
+          <p:cNvPr id="5" name="포인트"/>
+          <p:cNvSpPr/>
+          <p:nvPr/>
+        </p:nvSpPr>
+        <p:spPr>
+          <a:xfrm>
+            <a:off x="11167567" y="667512"/>
+            <a:ext cx="310896" cy="310896"/>
+          </a:xfrm>
+          <a:prstGeom prst="moon">
+            <a:avLst/>
+          </a:prstGeom>
+          <a:solidFill>
+            <a:srgbClr val="A6C6F2"/>
+          </a:solidFill>
+          <a:ln>
+            <a:noFill/>
+          </a:ln>
+        </p:spPr>
+        <p:txBody>
+          <a:bodyPr rtlCol="0" anchor="ctr"/>
+          <a:lstStyle/>
+          <a:p>
+            <a:pPr algn="ctr"/>
+          </a:p>
+        </p:txBody>
+      </p:sp>
+      <p:sp>
+        <p:nvSpPr>
           <p:cNvPr id="2" name="Title 1"/>
           <p:cNvSpPr>
             <a:spLocks noGrp="1"/>
@@ -3916,8 +4142,8 @@
         </p:nvSpPr>
         <p:spPr>
           <a:xfrm>
-            <a:off x="640080" y="457200"/>
-            <a:ext cx="9722815" cy="868680"/>
+            <a:off x="868680" y="566928"/>
+            <a:ext cx="9448495" cy="868680"/>
           </a:xfrm>
         </p:spPr>
         <p:txBody>
@@ -3934,7 +4160,7 @@
             <a:r>
               <a:rPr sz="3000" b="1" i="0">
                 <a:solidFill>
-                  <a:srgbClr val="1D4072"/>
+                  <a:srgbClr val="26231F"/>
                 </a:solidFill>
               </a:rPr>
               <a:t>식순 안내</a:t>
@@ -3944,14 +4170,14 @@
       </p:sp>
       <p:graphicFrame>
         <p:nvGraphicFramePr>
-          <p:cNvPr id="4" name="표"/>
+          <p:cNvPr id="6" name="표"/>
           <p:cNvGraphicFramePr>
             <a:graphicFrameLocks noGrp="1"/>
           </p:cNvGraphicFramePr>
           <p:nvPr/>
         </p:nvGraphicFramePr>
         <p:xfrm>
-          <a:off x="640080" y="1600200"/>
+          <a:off x="640080" y="1783080"/>
           <a:ext cx="10911535" cy="3950208"/>
         </p:xfrm>
         <a:graphic>
@@ -3975,7 +4201,7 @@
                       <a:r>
                         <a:rPr sz="1500" b="1">
                           <a:solidFill>
-                            <a:srgbClr val="FFFFFF"/>
+                            <a:srgbClr val="26231F"/>
                           </a:solidFill>
                         </a:rPr>
                         <a:t>시간</a:t>
@@ -3985,30 +4211,30 @@
                   <a:tcPr anchor="ctr" marL="73152" marR="73152">
                     <a:lnL w="9525" cap="flat" cmpd="sng" algn="ctr">
                       <a:solidFill>
-                        <a:srgbClr val="4981D0"/>
+                        <a:srgbClr val="97BBED"/>
                       </a:solidFill>
                       <a:prstDash val="solid"/>
                     </a:lnL>
                     <a:lnR w="9525" cap="flat" cmpd="sng" algn="ctr">
                       <a:solidFill>
-                        <a:srgbClr val="4981D0"/>
+                        <a:srgbClr val="97BBED"/>
                       </a:solidFill>
                       <a:prstDash val="solid"/>
                     </a:lnR>
                     <a:lnT w="9525" cap="flat" cmpd="sng" algn="ctr">
                       <a:solidFill>
-                        <a:srgbClr val="4981D0"/>
+                        <a:srgbClr val="97BBED"/>
                       </a:solidFill>
                       <a:prstDash val="solid"/>
                     </a:lnT>
                     <a:lnB w="9525" cap="flat" cmpd="sng" algn="ctr">
                       <a:solidFill>
-                        <a:srgbClr val="4981D0"/>
+                        <a:srgbClr val="97BBED"/>
                       </a:solidFill>
                       <a:prstDash val="solid"/>
                     </a:lnB>
                     <a:solidFill>
-                      <a:srgbClr val="4981D0"/>
+                      <a:srgbClr val="97BBED"/>
                     </a:solidFill>
                   </a:tcPr>
                 </a:tc>
@@ -4021,7 +4247,7 @@
                       <a:r>
                         <a:rPr sz="1500" b="1">
                           <a:solidFill>
-                            <a:srgbClr val="FFFFFF"/>
+                            <a:srgbClr val="26231F"/>
                           </a:solidFill>
                         </a:rPr>
                         <a:t>순서</a:t>
@@ -4031,30 +4257,30 @@
                   <a:tcPr anchor="ctr" marL="73152" marR="73152">
                     <a:lnL w="9525" cap="flat" cmpd="sng" algn="ctr">
                       <a:solidFill>
-                        <a:srgbClr val="4981D0"/>
+                        <a:srgbClr val="97BBED"/>
                       </a:solidFill>
                       <a:prstDash val="solid"/>
                     </a:lnL>
                     <a:lnR w="9525" cap="flat" cmpd="sng" algn="ctr">
                       <a:solidFill>
-                        <a:srgbClr val="4981D0"/>
+                        <a:srgbClr val="97BBED"/>
                       </a:solidFill>
                       <a:prstDash val="solid"/>
                     </a:lnR>
                     <a:lnT w="9525" cap="flat" cmpd="sng" algn="ctr">
                       <a:solidFill>
-                        <a:srgbClr val="4981D0"/>
+                        <a:srgbClr val="97BBED"/>
                       </a:solidFill>
                       <a:prstDash val="solid"/>
                     </a:lnT>
                     <a:lnB w="9525" cap="flat" cmpd="sng" algn="ctr">
                       <a:solidFill>
-                        <a:srgbClr val="4981D0"/>
+                        <a:srgbClr val="97BBED"/>
                       </a:solidFill>
                       <a:prstDash val="solid"/>
                     </a:lnB>
                     <a:solidFill>
-                      <a:srgbClr val="4981D0"/>
+                      <a:srgbClr val="97BBED"/>
                     </a:solidFill>
                   </a:tcPr>
                 </a:tc>
@@ -4067,7 +4293,7 @@
                       <a:r>
                         <a:rPr sz="1500" b="1">
                           <a:solidFill>
-                            <a:srgbClr val="FFFFFF"/>
+                            <a:srgbClr val="26231F"/>
                           </a:solidFill>
                         </a:rPr>
                         <a:t>담당</a:t>
@@ -4077,30 +4303,30 @@
                   <a:tcPr anchor="ctr" marL="73152" marR="73152">
                     <a:lnL w="9525" cap="flat" cmpd="sng" algn="ctr">
                       <a:solidFill>
-                        <a:srgbClr val="4981D0"/>
+                        <a:srgbClr val="97BBED"/>
                       </a:solidFill>
                       <a:prstDash val="solid"/>
                     </a:lnL>
                     <a:lnR w="9525" cap="flat" cmpd="sng" algn="ctr">
                       <a:solidFill>
-                        <a:srgbClr val="4981D0"/>
+                        <a:srgbClr val="97BBED"/>
                       </a:solidFill>
                       <a:prstDash val="solid"/>
                     </a:lnR>
                     <a:lnT w="9525" cap="flat" cmpd="sng" algn="ctr">
                       <a:solidFill>
-                        <a:srgbClr val="4981D0"/>
+                        <a:srgbClr val="97BBED"/>
                       </a:solidFill>
                       <a:prstDash val="solid"/>
                     </a:lnT>
                     <a:lnB w="9525" cap="flat" cmpd="sng" algn="ctr">
                       <a:solidFill>
-                        <a:srgbClr val="4981D0"/>
+                        <a:srgbClr val="97BBED"/>
                       </a:solidFill>
                       <a:prstDash val="solid"/>
                     </a:lnB>
                     <a:solidFill>
-                      <a:srgbClr val="4981D0"/>
+                      <a:srgbClr val="97BBED"/>
                     </a:solidFill>
                   </a:tcPr>
                 </a:tc>
@@ -4115,7 +4341,7 @@
                       <a:r>
                         <a:rPr sz="1500" b="1">
                           <a:solidFill>
-                            <a:srgbClr val="1D4072"/>
+                            <a:srgbClr val="273549"/>
                           </a:solidFill>
                         </a:rPr>
                         <a:t>00:00</a:t>
@@ -4125,30 +4351,30 @@
                   <a:tcPr anchor="ctr" marL="73152" marR="73152">
                     <a:lnL w="9525" cap="flat" cmpd="sng" algn="ctr">
                       <a:solidFill>
-                        <a:srgbClr val="D4E3F7"/>
+                        <a:srgbClr val="D1E2FA"/>
                       </a:solidFill>
                       <a:prstDash val="solid"/>
                     </a:lnL>
                     <a:lnR w="9525" cap="flat" cmpd="sng" algn="ctr">
                       <a:solidFill>
-                        <a:srgbClr val="D4E3F7"/>
+                        <a:srgbClr val="D1E2FA"/>
                       </a:solidFill>
                       <a:prstDash val="solid"/>
                     </a:lnR>
                     <a:lnT w="9525" cap="flat" cmpd="sng" algn="ctr">
                       <a:solidFill>
-                        <a:srgbClr val="D4E3F7"/>
+                        <a:srgbClr val="D1E2FA"/>
                       </a:solidFill>
                       <a:prstDash val="solid"/>
                     </a:lnT>
                     <a:lnB w="9525" cap="flat" cmpd="sng" algn="ctr">
                       <a:solidFill>
-                        <a:srgbClr val="D4E3F7"/>
+                        <a:srgbClr val="D1E2FA"/>
                       </a:solidFill>
                       <a:prstDash val="solid"/>
                     </a:lnB>
                     <a:solidFill>
-                      <a:srgbClr val="D4E3F7"/>
+                      <a:srgbClr val="D1E2FA"/>
                     </a:solidFill>
                   </a:tcPr>
                 </a:tc>
@@ -4161,7 +4387,7 @@
                       <a:r>
                         <a:rPr sz="1500" b="0">
                           <a:solidFill>
-                            <a:srgbClr val="2B2B2B"/>
+                            <a:srgbClr val="26231F"/>
                           </a:solidFill>
                         </a:rPr>
                         <a:t>하객 맞이</a:t>
@@ -4171,25 +4397,25 @@
                   <a:tcPr anchor="ctr" marL="73152" marR="73152">
                     <a:lnL w="9525" cap="flat" cmpd="sng" algn="ctr">
                       <a:solidFill>
-                        <a:srgbClr val="D4E3F7"/>
+                        <a:srgbClr val="D1E2FA"/>
                       </a:solidFill>
                       <a:prstDash val="solid"/>
                     </a:lnL>
                     <a:lnR w="9525" cap="flat" cmpd="sng" algn="ctr">
                       <a:solidFill>
-                        <a:srgbClr val="D4E3F7"/>
+                        <a:srgbClr val="D1E2FA"/>
                       </a:solidFill>
                       <a:prstDash val="solid"/>
                     </a:lnR>
                     <a:lnT w="9525" cap="flat" cmpd="sng" algn="ctr">
                       <a:solidFill>
-                        <a:srgbClr val="D4E3F7"/>
+                        <a:srgbClr val="D1E2FA"/>
                       </a:solidFill>
                       <a:prstDash val="solid"/>
                     </a:lnT>
                     <a:lnB w="9525" cap="flat" cmpd="sng" algn="ctr">
                       <a:solidFill>
-                        <a:srgbClr val="D4E3F7"/>
+                        <a:srgbClr val="D1E2FA"/>
                       </a:solidFill>
                       <a:prstDash val="solid"/>
                     </a:lnB>
@@ -4207,7 +4433,7 @@
                       <a:r>
                         <a:rPr sz="1500" b="0">
                           <a:solidFill>
-                            <a:srgbClr val="2B2B2B"/>
+                            <a:srgbClr val="26231F"/>
                           </a:solidFill>
                         </a:rPr>
                         <a:t/>
@@ -4217,25 +4443,25 @@
                   <a:tcPr anchor="ctr" marL="73152" marR="73152">
                     <a:lnL w="9525" cap="flat" cmpd="sng" algn="ctr">
                       <a:solidFill>
-                        <a:srgbClr val="D4E3F7"/>
+                        <a:srgbClr val="D1E2FA"/>
                       </a:solidFill>
                       <a:prstDash val="solid"/>
                     </a:lnL>
                     <a:lnR w="9525" cap="flat" cmpd="sng" algn="ctr">
                       <a:solidFill>
-                        <a:srgbClr val="D4E3F7"/>
+                        <a:srgbClr val="D1E2FA"/>
                       </a:solidFill>
                       <a:prstDash val="solid"/>
                     </a:lnR>
                     <a:lnT w="9525" cap="flat" cmpd="sng" algn="ctr">
                       <a:solidFill>
-                        <a:srgbClr val="D4E3F7"/>
+                        <a:srgbClr val="D1E2FA"/>
                       </a:solidFill>
                       <a:prstDash val="solid"/>
                     </a:lnT>
                     <a:lnB w="9525" cap="flat" cmpd="sng" algn="ctr">
                       <a:solidFill>
-                        <a:srgbClr val="D4E3F7"/>
+                        <a:srgbClr val="D1E2FA"/>
                       </a:solidFill>
                       <a:prstDash val="solid"/>
                     </a:lnB>
@@ -4255,7 +4481,7 @@
                       <a:r>
                         <a:rPr sz="1500" b="1">
                           <a:solidFill>
-                            <a:srgbClr val="1D4072"/>
+                            <a:srgbClr val="273549"/>
                           </a:solidFill>
                         </a:rPr>
                         <a:t>00:00</a:t>
@@ -4265,30 +4491,30 @@
                   <a:tcPr anchor="ctr" marL="73152" marR="73152">
                     <a:lnL w="9525" cap="flat" cmpd="sng" algn="ctr">
                       <a:solidFill>
-                        <a:srgbClr val="D4E3F7"/>
+                        <a:srgbClr val="D1E2FA"/>
                       </a:solidFill>
                       <a:prstDash val="solid"/>
                     </a:lnL>
                     <a:lnR w="9525" cap="flat" cmpd="sng" algn="ctr">
                       <a:solidFill>
-                        <a:srgbClr val="D4E3F7"/>
+                        <a:srgbClr val="D1E2FA"/>
                       </a:solidFill>
                       <a:prstDash val="solid"/>
                     </a:lnR>
                     <a:lnT w="9525" cap="flat" cmpd="sng" algn="ctr">
                       <a:solidFill>
-                        <a:srgbClr val="D4E3F7"/>
+                        <a:srgbClr val="D1E2FA"/>
                       </a:solidFill>
                       <a:prstDash val="solid"/>
                     </a:lnT>
                     <a:lnB w="9525" cap="flat" cmpd="sng" algn="ctr">
                       <a:solidFill>
-                        <a:srgbClr val="D4E3F7"/>
+                        <a:srgbClr val="D1E2FA"/>
                       </a:solidFill>
                       <a:prstDash val="solid"/>
                     </a:lnB>
                     <a:solidFill>
-                      <a:srgbClr val="D4E3F7"/>
+                      <a:srgbClr val="D1E2FA"/>
                     </a:solidFill>
                   </a:tcPr>
                 </a:tc>
@@ -4301,7 +4527,7 @@
                       <a:r>
                         <a:rPr sz="1500" b="0">
                           <a:solidFill>
-                            <a:srgbClr val="2B2B2B"/>
+                            <a:srgbClr val="26231F"/>
                           </a:solidFill>
                         </a:rPr>
                         <a:t>신랑 · 신부 입장</a:t>
@@ -4311,30 +4537,30 @@
                   <a:tcPr anchor="ctr" marL="73152" marR="73152">
                     <a:lnL w="9525" cap="flat" cmpd="sng" algn="ctr">
                       <a:solidFill>
-                        <a:srgbClr val="D4E3F7"/>
+                        <a:srgbClr val="D1E2FA"/>
                       </a:solidFill>
                       <a:prstDash val="solid"/>
                     </a:lnL>
                     <a:lnR w="9525" cap="flat" cmpd="sng" algn="ctr">
                       <a:solidFill>
-                        <a:srgbClr val="D4E3F7"/>
+                        <a:srgbClr val="D1E2FA"/>
                       </a:solidFill>
                       <a:prstDash val="solid"/>
                     </a:lnR>
                     <a:lnT w="9525" cap="flat" cmpd="sng" algn="ctr">
                       <a:solidFill>
-                        <a:srgbClr val="D4E3F7"/>
+                        <a:srgbClr val="D1E2FA"/>
                       </a:solidFill>
                       <a:prstDash val="solid"/>
                     </a:lnT>
                     <a:lnB w="9525" cap="flat" cmpd="sng" algn="ctr">
                       <a:solidFill>
-                        <a:srgbClr val="D4E3F7"/>
+                        <a:srgbClr val="D1E2FA"/>
                       </a:solidFill>
                       <a:prstDash val="solid"/>
                     </a:lnB>
                     <a:solidFill>
-                      <a:srgbClr val="F3F7FC"/>
+                      <a:srgbClr val="EAF2FD"/>
                     </a:solidFill>
                   </a:tcPr>
                 </a:tc>
@@ -4347,7 +4573,7 @@
                       <a:r>
                         <a:rPr sz="1500" b="0">
                           <a:solidFill>
-                            <a:srgbClr val="2B2B2B"/>
+                            <a:srgbClr val="26231F"/>
                           </a:solidFill>
                         </a:rPr>
                         <a:t/>
@@ -4357,30 +4583,30 @@
                   <a:tcPr anchor="ctr" marL="73152" marR="73152">
                     <a:lnL w="9525" cap="flat" cmpd="sng" algn="ctr">
                       <a:solidFill>
-                        <a:srgbClr val="D4E3F7"/>
+                        <a:srgbClr val="D1E2FA"/>
                       </a:solidFill>
                       <a:prstDash val="solid"/>
                     </a:lnL>
                     <a:lnR w="9525" cap="flat" cmpd="sng" algn="ctr">
                       <a:solidFill>
-                        <a:srgbClr val="D4E3F7"/>
+                        <a:srgbClr val="D1E2FA"/>
                       </a:solidFill>
                       <a:prstDash val="solid"/>
                     </a:lnR>
                     <a:lnT w="9525" cap="flat" cmpd="sng" algn="ctr">
                       <a:solidFill>
-                        <a:srgbClr val="D4E3F7"/>
+                        <a:srgbClr val="D1E2FA"/>
                       </a:solidFill>
                       <a:prstDash val="solid"/>
                     </a:lnT>
                     <a:lnB w="9525" cap="flat" cmpd="sng" algn="ctr">
                       <a:solidFill>
-                        <a:srgbClr val="D4E3F7"/>
+                        <a:srgbClr val="D1E2FA"/>
                       </a:solidFill>
                       <a:prstDash val="solid"/>
                     </a:lnB>
                     <a:solidFill>
-                      <a:srgbClr val="F3F7FC"/>
+                      <a:srgbClr val="EAF2FD"/>
                     </a:solidFill>
                   </a:tcPr>
                 </a:tc>
@@ -4395,7 +4621,7 @@
                       <a:r>
                         <a:rPr sz="1500" b="1">
                           <a:solidFill>
-                            <a:srgbClr val="1D4072"/>
+                            <a:srgbClr val="273549"/>
                           </a:solidFill>
                         </a:rPr>
                         <a:t>00:00</a:t>
@@ -4405,30 +4631,30 @@
                   <a:tcPr anchor="ctr" marL="73152" marR="73152">
                     <a:lnL w="9525" cap="flat" cmpd="sng" algn="ctr">
                       <a:solidFill>
-                        <a:srgbClr val="D4E3F7"/>
+                        <a:srgbClr val="D1E2FA"/>
                       </a:solidFill>
                       <a:prstDash val="solid"/>
                     </a:lnL>
                     <a:lnR w="9525" cap="flat" cmpd="sng" algn="ctr">
                       <a:solidFill>
-                        <a:srgbClr val="D4E3F7"/>
+                        <a:srgbClr val="D1E2FA"/>
                       </a:solidFill>
                       <a:prstDash val="solid"/>
                     </a:lnR>
                     <a:lnT w="9525" cap="flat" cmpd="sng" algn="ctr">
                       <a:solidFill>
-                        <a:srgbClr val="D4E3F7"/>
+                        <a:srgbClr val="D1E2FA"/>
                       </a:solidFill>
                       <a:prstDash val="solid"/>
                     </a:lnT>
                     <a:lnB w="9525" cap="flat" cmpd="sng" algn="ctr">
                       <a:solidFill>
-                        <a:srgbClr val="D4E3F7"/>
+                        <a:srgbClr val="D1E2FA"/>
                       </a:solidFill>
                       <a:prstDash val="solid"/>
                     </a:lnB>
                     <a:solidFill>
-                      <a:srgbClr val="D4E3F7"/>
+                      <a:srgbClr val="D1E2FA"/>
                     </a:solidFill>
                   </a:tcPr>
                 </a:tc>
@@ -4441,7 +4667,7 @@
                       <a:r>
                         <a:rPr sz="1500" b="0">
                           <a:solidFill>
-                            <a:srgbClr val="2B2B2B"/>
+                            <a:srgbClr val="26231F"/>
                           </a:solidFill>
                         </a:rPr>
                         <a:t>혼인 서약</a:t>
@@ -4451,25 +4677,25 @@
                   <a:tcPr anchor="ctr" marL="73152" marR="73152">
                     <a:lnL w="9525" cap="flat" cmpd="sng" algn="ctr">
                       <a:solidFill>
-                        <a:srgbClr val="D4E3F7"/>
+                        <a:srgbClr val="D1E2FA"/>
                       </a:solidFill>
                       <a:prstDash val="solid"/>
                     </a:lnL>
                     <a:lnR w="9525" cap="flat" cmpd="sng" algn="ctr">
                       <a:solidFill>
-                        <a:srgbClr val="D4E3F7"/>
+                        <a:srgbClr val="D1E2FA"/>
                       </a:solidFill>
                       <a:prstDash val="solid"/>
                     </a:lnR>
                     <a:lnT w="9525" cap="flat" cmpd="sng" algn="ctr">
                       <a:solidFill>
-                        <a:srgbClr val="D4E3F7"/>
+                        <a:srgbClr val="D1E2FA"/>
                       </a:solidFill>
                       <a:prstDash val="solid"/>
                     </a:lnT>
                     <a:lnB w="9525" cap="flat" cmpd="sng" algn="ctr">
                       <a:solidFill>
-                        <a:srgbClr val="D4E3F7"/>
+                        <a:srgbClr val="D1E2FA"/>
                       </a:solidFill>
                       <a:prstDash val="solid"/>
                     </a:lnB>
@@ -4487,7 +4713,7 @@
                       <a:r>
                         <a:rPr sz="1500" b="0">
                           <a:solidFill>
-                            <a:srgbClr val="2B2B2B"/>
+                            <a:srgbClr val="26231F"/>
                           </a:solidFill>
                         </a:rPr>
                         <a:t/>
@@ -4497,25 +4723,25 @@
                   <a:tcPr anchor="ctr" marL="73152" marR="73152">
                     <a:lnL w="9525" cap="flat" cmpd="sng" algn="ctr">
                       <a:solidFill>
-                        <a:srgbClr val="D4E3F7"/>
+                        <a:srgbClr val="D1E2FA"/>
                       </a:solidFill>
                       <a:prstDash val="solid"/>
                     </a:lnL>
                     <a:lnR w="9525" cap="flat" cmpd="sng" algn="ctr">
                       <a:solidFill>
-                        <a:srgbClr val="D4E3F7"/>
+                        <a:srgbClr val="D1E2FA"/>
                       </a:solidFill>
                       <a:prstDash val="solid"/>
                     </a:lnR>
                     <a:lnT w="9525" cap="flat" cmpd="sng" algn="ctr">
                       <a:solidFill>
-                        <a:srgbClr val="D4E3F7"/>
+                        <a:srgbClr val="D1E2FA"/>
                       </a:solidFill>
                       <a:prstDash val="solid"/>
                     </a:lnT>
                     <a:lnB w="9525" cap="flat" cmpd="sng" algn="ctr">
                       <a:solidFill>
-                        <a:srgbClr val="D4E3F7"/>
+                        <a:srgbClr val="D1E2FA"/>
                       </a:solidFill>
                       <a:prstDash val="solid"/>
                     </a:lnB>
@@ -4535,7 +4761,7 @@
                       <a:r>
                         <a:rPr sz="1500" b="1">
                           <a:solidFill>
-                            <a:srgbClr val="1D4072"/>
+                            <a:srgbClr val="273549"/>
                           </a:solidFill>
                         </a:rPr>
                         <a:t>00:00</a:t>
@@ -4545,30 +4771,30 @@
                   <a:tcPr anchor="ctr" marL="73152" marR="73152">
                     <a:lnL w="9525" cap="flat" cmpd="sng" algn="ctr">
                       <a:solidFill>
-                        <a:srgbClr val="D4E3F7"/>
+                        <a:srgbClr val="D1E2FA"/>
                       </a:solidFill>
                       <a:prstDash val="solid"/>
                     </a:lnL>
                     <a:lnR w="9525" cap="flat" cmpd="sng" algn="ctr">
                       <a:solidFill>
-                        <a:srgbClr val="D4E3F7"/>
+                        <a:srgbClr val="D1E2FA"/>
                       </a:solidFill>
                       <a:prstDash val="solid"/>
                     </a:lnR>
                     <a:lnT w="9525" cap="flat" cmpd="sng" algn="ctr">
                       <a:solidFill>
-                        <a:srgbClr val="D4E3F7"/>
+                        <a:srgbClr val="D1E2FA"/>
                       </a:solidFill>
                       <a:prstDash val="solid"/>
                     </a:lnT>
                     <a:lnB w="9525" cap="flat" cmpd="sng" algn="ctr">
                       <a:solidFill>
-                        <a:srgbClr val="D4E3F7"/>
+                        <a:srgbClr val="D1E2FA"/>
                       </a:solidFill>
                       <a:prstDash val="solid"/>
                     </a:lnB>
                     <a:solidFill>
-                      <a:srgbClr val="D4E3F7"/>
+                      <a:srgbClr val="D1E2FA"/>
                     </a:solidFill>
                   </a:tcPr>
                 </a:tc>
@@ -4581,7 +4807,7 @@
                       <a:r>
                         <a:rPr sz="1500" b="0">
                           <a:solidFill>
-                            <a:srgbClr val="2B2B2B"/>
+                            <a:srgbClr val="26231F"/>
                           </a:solidFill>
                         </a:rPr>
                         <a:t>축가 · 감사 인사</a:t>
@@ -4591,30 +4817,30 @@
                   <a:tcPr anchor="ctr" marL="73152" marR="73152">
                     <a:lnL w="9525" cap="flat" cmpd="sng" algn="ctr">
                       <a:solidFill>
-                        <a:srgbClr val="D4E3F7"/>
+                        <a:srgbClr val="D1E2FA"/>
                       </a:solidFill>
                       <a:prstDash val="solid"/>
                     </a:lnL>
                     <a:lnR w="9525" cap="flat" cmpd="sng" algn="ctr">
                       <a:solidFill>
-                        <a:srgbClr val="D4E3F7"/>
+                        <a:srgbClr val="D1E2FA"/>
                       </a:solidFill>
                       <a:prstDash val="solid"/>
                     </a:lnR>
                     <a:lnT w="9525" cap="flat" cmpd="sng" algn="ctr">
                       <a:solidFill>
-                        <a:srgbClr val="D4E3F7"/>
+                        <a:srgbClr val="D1E2FA"/>
                       </a:solidFill>
                       <a:prstDash val="solid"/>
                     </a:lnT>
                     <a:lnB w="9525" cap="flat" cmpd="sng" algn="ctr">
                       <a:solidFill>
-                        <a:srgbClr val="D4E3F7"/>
+                        <a:srgbClr val="D1E2FA"/>
                       </a:solidFill>
                       <a:prstDash val="solid"/>
                     </a:lnB>
                     <a:solidFill>
-                      <a:srgbClr val="F3F7FC"/>
+                      <a:srgbClr val="EAF2FD"/>
                     </a:solidFill>
                   </a:tcPr>
                 </a:tc>
@@ -4627,7 +4853,7 @@
                       <a:r>
                         <a:rPr sz="1500" b="0">
                           <a:solidFill>
-                            <a:srgbClr val="2B2B2B"/>
+                            <a:srgbClr val="26231F"/>
                           </a:solidFill>
                         </a:rPr>
                         <a:t/>
@@ -4637,30 +4863,30 @@
                   <a:tcPr anchor="ctr" marL="73152" marR="73152">
                     <a:lnL w="9525" cap="flat" cmpd="sng" algn="ctr">
                       <a:solidFill>
-                        <a:srgbClr val="D4E3F7"/>
+                        <a:srgbClr val="D1E2FA"/>
                       </a:solidFill>
                       <a:prstDash val="solid"/>
                     </a:lnL>
                     <a:lnR w="9525" cap="flat" cmpd="sng" algn="ctr">
                       <a:solidFill>
-                        <a:srgbClr val="D4E3F7"/>
+                        <a:srgbClr val="D1E2FA"/>
                       </a:solidFill>
                       <a:prstDash val="solid"/>
                     </a:lnR>
                     <a:lnT w="9525" cap="flat" cmpd="sng" algn="ctr">
                       <a:solidFill>
-                        <a:srgbClr val="D4E3F7"/>
+                        <a:srgbClr val="D1E2FA"/>
                       </a:solidFill>
                       <a:prstDash val="solid"/>
                     </a:lnT>
                     <a:lnB w="9525" cap="flat" cmpd="sng" algn="ctr">
                       <a:solidFill>
-                        <a:srgbClr val="D4E3F7"/>
+                        <a:srgbClr val="D1E2FA"/>
                       </a:solidFill>
                       <a:prstDash val="solid"/>
                     </a:lnB>
                     <a:solidFill>
-                      <a:srgbClr val="F3F7FC"/>
+                      <a:srgbClr val="EAF2FD"/>
                     </a:solidFill>
                   </a:tcPr>
                 </a:tc>
@@ -4675,7 +4901,7 @@
                       <a:r>
                         <a:rPr sz="1500" b="1">
                           <a:solidFill>
-                            <a:srgbClr val="1D4072"/>
+                            <a:srgbClr val="273549"/>
                           </a:solidFill>
                         </a:rPr>
                         <a:t>00:00</a:t>
@@ -4685,30 +4911,30 @@
                   <a:tcPr anchor="ctr" marL="73152" marR="73152">
                     <a:lnL w="9525" cap="flat" cmpd="sng" algn="ctr">
                       <a:solidFill>
-                        <a:srgbClr val="D4E3F7"/>
+                        <a:srgbClr val="D1E2FA"/>
                       </a:solidFill>
                       <a:prstDash val="solid"/>
                     </a:lnL>
                     <a:lnR w="9525" cap="flat" cmpd="sng" algn="ctr">
                       <a:solidFill>
-                        <a:srgbClr val="D4E3F7"/>
+                        <a:srgbClr val="D1E2FA"/>
                       </a:solidFill>
                       <a:prstDash val="solid"/>
                     </a:lnR>
                     <a:lnT w="9525" cap="flat" cmpd="sng" algn="ctr">
                       <a:solidFill>
-                        <a:srgbClr val="D4E3F7"/>
+                        <a:srgbClr val="D1E2FA"/>
                       </a:solidFill>
                       <a:prstDash val="solid"/>
                     </a:lnT>
                     <a:lnB w="9525" cap="flat" cmpd="sng" algn="ctr">
                       <a:solidFill>
-                        <a:srgbClr val="D4E3F7"/>
+                        <a:srgbClr val="D1E2FA"/>
                       </a:solidFill>
                       <a:prstDash val="solid"/>
                     </a:lnB>
                     <a:solidFill>
-                      <a:srgbClr val="D4E3F7"/>
+                      <a:srgbClr val="D1E2FA"/>
                     </a:solidFill>
                   </a:tcPr>
                 </a:tc>
@@ -4721,7 +4947,7 @@
                       <a:r>
                         <a:rPr sz="1500" b="0">
                           <a:solidFill>
-                            <a:srgbClr val="2B2B2B"/>
+                            <a:srgbClr val="26231F"/>
                           </a:solidFill>
                         </a:rPr>
                         <a:t>기념 촬영 · 식사</a:t>
@@ -4731,25 +4957,25 @@
                   <a:tcPr anchor="ctr" marL="73152" marR="73152">
                     <a:lnL w="9525" cap="flat" cmpd="sng" algn="ctr">
                       <a:solidFill>
-                        <a:srgbClr val="D4E3F7"/>
+                        <a:srgbClr val="D1E2FA"/>
                       </a:solidFill>
                       <a:prstDash val="solid"/>
                     </a:lnL>
                     <a:lnR w="9525" cap="flat" cmpd="sng" algn="ctr">
                       <a:solidFill>
-                        <a:srgbClr val="D4E3F7"/>
+                        <a:srgbClr val="D1E2FA"/>
                       </a:solidFill>
                       <a:prstDash val="solid"/>
                     </a:lnR>
                     <a:lnT w="9525" cap="flat" cmpd="sng" algn="ctr">
                       <a:solidFill>
-                        <a:srgbClr val="D4E3F7"/>
+                        <a:srgbClr val="D1E2FA"/>
                       </a:solidFill>
                       <a:prstDash val="solid"/>
                     </a:lnT>
                     <a:lnB w="9525" cap="flat" cmpd="sng" algn="ctr">
                       <a:solidFill>
-                        <a:srgbClr val="D4E3F7"/>
+                        <a:srgbClr val="D1E2FA"/>
                       </a:solidFill>
                       <a:prstDash val="solid"/>
                     </a:lnB>
@@ -4767,7 +4993,7 @@
                       <a:r>
                         <a:rPr sz="1500" b="0">
                           <a:solidFill>
-                            <a:srgbClr val="2B2B2B"/>
+                            <a:srgbClr val="26231F"/>
                           </a:solidFill>
                         </a:rPr>
                         <a:t/>
@@ -4777,25 +5003,25 @@
                   <a:tcPr anchor="ctr" marL="73152" marR="73152">
                     <a:lnL w="9525" cap="flat" cmpd="sng" algn="ctr">
                       <a:solidFill>
-                        <a:srgbClr val="D4E3F7"/>
+                        <a:srgbClr val="D1E2FA"/>
                       </a:solidFill>
                       <a:prstDash val="solid"/>
                     </a:lnL>
                     <a:lnR w="9525" cap="flat" cmpd="sng" algn="ctr">
                       <a:solidFill>
-                        <a:srgbClr val="D4E3F7"/>
+                        <a:srgbClr val="D1E2FA"/>
                       </a:solidFill>
                       <a:prstDash val="solid"/>
                     </a:lnR>
                     <a:lnT w="9525" cap="flat" cmpd="sng" algn="ctr">
                       <a:solidFill>
-                        <a:srgbClr val="D4E3F7"/>
+                        <a:srgbClr val="D1E2FA"/>
                       </a:solidFill>
                       <a:prstDash val="solid"/>
                     </a:lnT>
                     <a:lnB w="9525" cap="flat" cmpd="sng" algn="ctr">
                       <a:solidFill>
-                        <a:srgbClr val="D4E3F7"/>
+                        <a:srgbClr val="D1E2FA"/>
                       </a:solidFill>
                       <a:prstDash val="solid"/>
                     </a:lnB>
@@ -4823,7 +5049,7 @@
     <p:bg>
       <p:bgPr>
         <a:solidFill>
-          <a:srgbClr val="F3F7FC"/>
+          <a:srgbClr val="FAFBFD"/>
         </a:solidFill>
         <a:effectLst/>
       </p:bgPr>
@@ -4842,18 +5068,17 @@
           <p:nvPr/>
         </p:nvSpPr>
         <p:spPr>
-          <a:xfrm rot="10800000">
-            <a:off x="10637215" y="0"/>
-            <a:ext cx="914400" cy="1554480"/>
-          </a:xfrm>
-          <a:prstGeom prst="round2SameRect">
+          <a:xfrm>
+            <a:off x="640080" y="566928"/>
+            <a:ext cx="64008" cy="868680"/>
+          </a:xfrm>
+          <a:prstGeom prst="roundRect">
             <a:avLst>
-              <a:gd name="adj1" fmla="val 50000"/>
-              <a:gd name="adj2" fmla="val 0"/>
+              <a:gd name="adj" fmla="val 50000"/>
             </a:avLst>
           </a:prstGeom>
           <a:solidFill>
-            <a:srgbClr val="D4E3F7"/>
+            <a:srgbClr val="97BBED"/>
           </a:solidFill>
           <a:ln>
             <a:noFill/>
@@ -4869,6 +5094,73 @@
       </p:sp>
       <p:sp>
         <p:nvSpPr>
+          <p:cNvPr id="4" name="상단 라벨"/>
+          <p:cNvSpPr txBox="1"/>
+          <p:nvPr/>
+        </p:nvSpPr>
+        <p:spPr>
+          <a:xfrm>
+            <a:off x="868680" y="274320"/>
+            <a:ext cx="5486400" cy="274320"/>
+          </a:xfrm>
+          <a:prstGeom prst="rect">
+            <a:avLst/>
+          </a:prstGeom>
+          <a:noFill/>
+        </p:spPr>
+        <p:txBody>
+          <a:bodyPr wrap="square" lIns="54864" rIns="54864" tIns="27432" bIns="27432" anchor="ctr">
+            <a:noAutofit/>
+          </a:bodyPr>
+          <a:lstStyle/>
+          <a:p>
+            <a:pPr algn="l">
+              <a:lnSpc>
+                <a:spcPct val="115000"/>
+              </a:lnSpc>
+            </a:pPr>
+            <a:r>
+              <a:rPr sz="900" b="1" i="0" spc="250">
+                <a:solidFill>
+                  <a:srgbClr val="8E8780"/>
+                </a:solidFill>
+              </a:rPr>
+              <a:t>WEDDING</a:t>
+            </a:r>
+          </a:p>
+        </p:txBody>
+      </p:sp>
+      <p:sp>
+        <p:nvSpPr>
+          <p:cNvPr id="5" name="포인트"/>
+          <p:cNvSpPr/>
+          <p:nvPr/>
+        </p:nvSpPr>
+        <p:spPr>
+          <a:xfrm>
+            <a:off x="11167567" y="667512"/>
+            <a:ext cx="310896" cy="310896"/>
+          </a:xfrm>
+          <a:prstGeom prst="moon">
+            <a:avLst/>
+          </a:prstGeom>
+          <a:solidFill>
+            <a:srgbClr val="A6C6F2"/>
+          </a:solidFill>
+          <a:ln>
+            <a:noFill/>
+          </a:ln>
+        </p:spPr>
+        <p:txBody>
+          <a:bodyPr rtlCol="0" anchor="ctr"/>
+          <a:lstStyle/>
+          <a:p>
+            <a:pPr algn="ctr"/>
+          </a:p>
+        </p:txBody>
+      </p:sp>
+      <p:sp>
+        <p:nvSpPr>
           <p:cNvPr id="2" name="Title 1"/>
           <p:cNvSpPr>
             <a:spLocks noGrp="1"/>
@@ -4879,8 +5171,8 @@
         </p:nvSpPr>
         <p:spPr>
           <a:xfrm>
-            <a:off x="640080" y="457200"/>
-            <a:ext cx="9722815" cy="868680"/>
+            <a:off x="868680" y="566928"/>
+            <a:ext cx="9448495" cy="868680"/>
           </a:xfrm>
         </p:spPr>
         <p:txBody>
@@ -4897,7 +5189,7 @@
             <a:r>
               <a:rPr sz="3000" b="1" i="0">
                 <a:solidFill>
-                  <a:srgbClr val="1D4072"/>
+                  <a:srgbClr val="26231F"/>
                 </a:solidFill>
               </a:rPr>
               <a:t>하객 안내</a:t>
@@ -4907,26 +5199,24 @@
       </p:sp>
       <p:sp>
         <p:nvSpPr>
-          <p:cNvPr id="4" name="카드 1"/>
+          <p:cNvPr id="6" name="카드 1"/>
           <p:cNvSpPr/>
           <p:nvPr/>
         </p:nvSpPr>
         <p:spPr>
           <a:xfrm>
-            <a:off x="640080" y="1600200"/>
-            <a:ext cx="3484778" cy="4800600"/>
+            <a:off x="640080" y="1783080"/>
+            <a:ext cx="3484778" cy="4572000"/>
           </a:xfrm>
           <a:prstGeom prst="roundRect">
             <a:avLst>
-              <a:gd name="adj" fmla="val 8000"/>
+              <a:gd name="adj" fmla="val 7000"/>
             </a:avLst>
           </a:prstGeom>
-          <a:solidFill>
-            <a:srgbClr val="F3F7FC"/>
-          </a:solidFill>
+          <a:noFill/>
           <a:ln w="15875">
             <a:solidFill>
-              <a:srgbClr val="D4E3F7"/>
+              <a:srgbClr val="97BBED"/>
             </a:solidFill>
           </a:ln>
         </p:spPr>
@@ -4940,23 +5230,23 @@
       </p:sp>
       <p:sp>
         <p:nvSpPr>
-          <p:cNvPr id="5" name="번호 1"/>
+          <p:cNvPr id="7" name="번호 1"/>
           <p:cNvSpPr/>
           <p:nvPr/>
         </p:nvSpPr>
         <p:spPr>
           <a:xfrm>
-            <a:off x="822959" y="1783080"/>
+            <a:off x="822959" y="1965960"/>
             <a:ext cx="457200" cy="457200"/>
           </a:xfrm>
           <a:prstGeom prst="ellipse">
             <a:avLst/>
           </a:prstGeom>
-          <a:solidFill>
-            <a:srgbClr val="4981D0"/>
-          </a:solidFill>
-          <a:ln>
-            <a:noFill/>
+          <a:noFill/>
+          <a:ln w="19050">
+            <a:solidFill>
+              <a:srgbClr val="97BBED"/>
+            </a:solidFill>
           </a:ln>
         </p:spPr>
         <p:txBody>
@@ -4973,7 +5263,7 @@
             <a:r>
               <a:rPr sz="1600" b="1" i="0">
                 <a:solidFill>
-                  <a:srgbClr val="FFFFFF"/>
+                  <a:srgbClr val="273549"/>
                 </a:solidFill>
               </a:rPr>
               <a:t>1</a:t>
@@ -4983,13 +5273,13 @@
       </p:sp>
       <p:sp>
         <p:nvSpPr>
-          <p:cNvPr id="6" name="TextBox 5"/>
+          <p:cNvPr id="8" name="TextBox 7"/>
           <p:cNvSpPr txBox="1"/>
           <p:nvPr/>
         </p:nvSpPr>
         <p:spPr>
           <a:xfrm>
-            <a:off x="777240" y="2377440"/>
+            <a:off x="777240" y="2560320"/>
             <a:ext cx="3210458" cy="640080"/>
           </a:xfrm>
           <a:prstGeom prst="rect">
@@ -5011,7 +5301,7 @@
             <a:r>
               <a:rPr sz="1800" b="1" i="0">
                 <a:solidFill>
-                  <a:srgbClr val="1D4072"/>
+                  <a:srgbClr val="273549"/>
                 </a:solidFill>
               </a:rPr>
               <a:t>주차 안내</a:t>
@@ -5021,14 +5311,14 @@
       </p:sp>
       <p:sp>
         <p:nvSpPr>
-          <p:cNvPr id="7" name="TextBox 6"/>
+          <p:cNvPr id="9" name="TextBox 8"/>
           <p:cNvSpPr txBox="1"/>
           <p:nvPr/>
         </p:nvSpPr>
         <p:spPr>
           <a:xfrm>
-            <a:off x="777240" y="3063240"/>
-            <a:ext cx="3210458" cy="3200400"/>
+            <a:off x="777240" y="3246120"/>
+            <a:ext cx="3210458" cy="2971800"/>
           </a:xfrm>
           <a:prstGeom prst="rect">
             <a:avLst/>
@@ -5049,7 +5339,7 @@
             <a:r>
               <a:rPr sz="1500" b="0" i="0">
                 <a:solidFill>
-                  <a:srgbClr val="2B2B2B"/>
+                  <a:srgbClr val="26231F"/>
                 </a:solidFill>
               </a:rPr>
               <a:t>입력하세요</a:t>
@@ -5059,26 +5349,24 @@
       </p:sp>
       <p:sp>
         <p:nvSpPr>
-          <p:cNvPr id="8" name="카드 2"/>
+          <p:cNvPr id="10" name="카드 2"/>
           <p:cNvSpPr/>
           <p:nvPr/>
         </p:nvSpPr>
         <p:spPr>
           <a:xfrm>
-            <a:off x="4353458" y="1600200"/>
-            <a:ext cx="3484778" cy="4800600"/>
+            <a:off x="4353458" y="1783080"/>
+            <a:ext cx="3484778" cy="4572000"/>
           </a:xfrm>
           <a:prstGeom prst="roundRect">
             <a:avLst>
-              <a:gd name="adj" fmla="val 8000"/>
+              <a:gd name="adj" fmla="val 7000"/>
             </a:avLst>
           </a:prstGeom>
-          <a:solidFill>
-            <a:srgbClr val="F3F7FC"/>
-          </a:solidFill>
+          <a:noFill/>
           <a:ln w="15875">
             <a:solidFill>
-              <a:srgbClr val="D4E3F7"/>
+              <a:srgbClr val="97BBED"/>
             </a:solidFill>
           </a:ln>
         </p:spPr>
@@ -5092,23 +5380,23 @@
       </p:sp>
       <p:sp>
         <p:nvSpPr>
-          <p:cNvPr id="9" name="번호 2"/>
+          <p:cNvPr id="11" name="번호 2"/>
           <p:cNvSpPr/>
           <p:nvPr/>
         </p:nvSpPr>
         <p:spPr>
           <a:xfrm>
-            <a:off x="4536338" y="1783080"/>
+            <a:off x="4536338" y="1965960"/>
             <a:ext cx="457200" cy="457200"/>
           </a:xfrm>
           <a:prstGeom prst="ellipse">
             <a:avLst/>
           </a:prstGeom>
-          <a:solidFill>
-            <a:srgbClr val="4981D0"/>
-          </a:solidFill>
-          <a:ln>
-            <a:noFill/>
+          <a:noFill/>
+          <a:ln w="19050">
+            <a:solidFill>
+              <a:srgbClr val="97BBED"/>
+            </a:solidFill>
           </a:ln>
         </p:spPr>
         <p:txBody>
@@ -5125,7 +5413,7 @@
             <a:r>
               <a:rPr sz="1600" b="1" i="0">
                 <a:solidFill>
-                  <a:srgbClr val="FFFFFF"/>
+                  <a:srgbClr val="273549"/>
                 </a:solidFill>
               </a:rPr>
               <a:t>2</a:t>
@@ -5135,13 +5423,13 @@
       </p:sp>
       <p:sp>
         <p:nvSpPr>
-          <p:cNvPr id="10" name="TextBox 9"/>
+          <p:cNvPr id="12" name="TextBox 11"/>
           <p:cNvSpPr txBox="1"/>
           <p:nvPr/>
         </p:nvSpPr>
         <p:spPr>
           <a:xfrm>
-            <a:off x="4490618" y="2377440"/>
+            <a:off x="4490618" y="2560320"/>
             <a:ext cx="3210458" cy="640080"/>
           </a:xfrm>
           <a:prstGeom prst="rect">
@@ -5163,7 +5451,7 @@
             <a:r>
               <a:rPr sz="1800" b="1" i="0">
                 <a:solidFill>
-                  <a:srgbClr val="1D4072"/>
+                  <a:srgbClr val="273549"/>
                 </a:solidFill>
               </a:rPr>
               <a:t>식사 안내</a:t>
@@ -5173,14 +5461,14 @@
       </p:sp>
       <p:sp>
         <p:nvSpPr>
-          <p:cNvPr id="11" name="TextBox 10"/>
+          <p:cNvPr id="13" name="TextBox 12"/>
           <p:cNvSpPr txBox="1"/>
           <p:nvPr/>
         </p:nvSpPr>
         <p:spPr>
           <a:xfrm>
-            <a:off x="4490618" y="3063240"/>
-            <a:ext cx="3210458" cy="3200400"/>
+            <a:off x="4490618" y="3246120"/>
+            <a:ext cx="3210458" cy="2971800"/>
           </a:xfrm>
           <a:prstGeom prst="rect">
             <a:avLst/>
@@ -5201,7 +5489,7 @@
             <a:r>
               <a:rPr sz="1500" b="0" i="0">
                 <a:solidFill>
-                  <a:srgbClr val="2B2B2B"/>
+                  <a:srgbClr val="26231F"/>
                 </a:solidFill>
               </a:rPr>
               <a:t>입력하세요</a:t>
@@ -5211,26 +5499,24 @@
       </p:sp>
       <p:sp>
         <p:nvSpPr>
-          <p:cNvPr id="12" name="카드 3"/>
+          <p:cNvPr id="14" name="카드 3"/>
           <p:cNvSpPr/>
           <p:nvPr/>
         </p:nvSpPr>
         <p:spPr>
           <a:xfrm>
-            <a:off x="8066836" y="1600200"/>
-            <a:ext cx="3484778" cy="4800600"/>
+            <a:off x="8066836" y="1783080"/>
+            <a:ext cx="3484778" cy="4572000"/>
           </a:xfrm>
           <a:prstGeom prst="roundRect">
             <a:avLst>
-              <a:gd name="adj" fmla="val 8000"/>
+              <a:gd name="adj" fmla="val 7000"/>
             </a:avLst>
           </a:prstGeom>
-          <a:solidFill>
-            <a:srgbClr val="F3F7FC"/>
-          </a:solidFill>
+          <a:noFill/>
           <a:ln w="15875">
             <a:solidFill>
-              <a:srgbClr val="D4E3F7"/>
+              <a:srgbClr val="97BBED"/>
             </a:solidFill>
           </a:ln>
         </p:spPr>
@@ -5244,23 +5530,23 @@
       </p:sp>
       <p:sp>
         <p:nvSpPr>
-          <p:cNvPr id="13" name="번호 3"/>
+          <p:cNvPr id="15" name="번호 3"/>
           <p:cNvSpPr/>
           <p:nvPr/>
         </p:nvSpPr>
         <p:spPr>
           <a:xfrm>
-            <a:off x="8249716" y="1783080"/>
+            <a:off x="8249716" y="1965960"/>
             <a:ext cx="457200" cy="457200"/>
           </a:xfrm>
           <a:prstGeom prst="ellipse">
             <a:avLst/>
           </a:prstGeom>
-          <a:solidFill>
-            <a:srgbClr val="4981D0"/>
-          </a:solidFill>
-          <a:ln>
-            <a:noFill/>
+          <a:noFill/>
+          <a:ln w="19050">
+            <a:solidFill>
+              <a:srgbClr val="97BBED"/>
+            </a:solidFill>
           </a:ln>
         </p:spPr>
         <p:txBody>
@@ -5277,7 +5563,7 @@
             <a:r>
               <a:rPr sz="1600" b="1" i="0">
                 <a:solidFill>
-                  <a:srgbClr val="FFFFFF"/>
+                  <a:srgbClr val="273549"/>
                 </a:solidFill>
               </a:rPr>
               <a:t>3</a:t>
@@ -5287,13 +5573,13 @@
       </p:sp>
       <p:sp>
         <p:nvSpPr>
-          <p:cNvPr id="14" name="TextBox 13"/>
+          <p:cNvPr id="16" name="TextBox 15"/>
           <p:cNvSpPr txBox="1"/>
           <p:nvPr/>
         </p:nvSpPr>
         <p:spPr>
           <a:xfrm>
-            <a:off x="8203996" y="2377440"/>
+            <a:off x="8203996" y="2560320"/>
             <a:ext cx="3210458" cy="640080"/>
           </a:xfrm>
           <a:prstGeom prst="rect">
@@ -5315,7 +5601,7 @@
             <a:r>
               <a:rPr sz="1800" b="1" i="0">
                 <a:solidFill>
-                  <a:srgbClr val="1D4072"/>
+                  <a:srgbClr val="273549"/>
                 </a:solidFill>
               </a:rPr>
               <a:t>기념 촬영</a:t>
@@ -5325,14 +5611,14 @@
       </p:sp>
       <p:sp>
         <p:nvSpPr>
-          <p:cNvPr id="15" name="TextBox 14"/>
+          <p:cNvPr id="17" name="TextBox 16"/>
           <p:cNvSpPr txBox="1"/>
           <p:nvPr/>
         </p:nvSpPr>
         <p:spPr>
           <a:xfrm>
-            <a:off x="8203996" y="3063240"/>
-            <a:ext cx="3210458" cy="3200400"/>
+            <a:off x="8203996" y="3246120"/>
+            <a:ext cx="3210458" cy="2971800"/>
           </a:xfrm>
           <a:prstGeom prst="rect">
             <a:avLst/>
@@ -5353,7 +5639,7 @@
             <a:r>
               <a:rPr sz="1500" b="0" i="0">
                 <a:solidFill>
-                  <a:srgbClr val="2B2B2B"/>
+                  <a:srgbClr val="26231F"/>
                 </a:solidFill>
               </a:rPr>
               <a:t>입력하세요</a:t>
@@ -5375,7 +5661,7 @@
     <p:bg>
       <p:bgPr>
         <a:solidFill>
-          <a:srgbClr val="F3F7FC"/>
+          <a:srgbClr val="FAFBFD"/>
         </a:solidFill>
         <a:effectLst/>
       </p:bgPr>
@@ -5394,18 +5680,17 @@
           <p:nvPr/>
         </p:nvSpPr>
         <p:spPr>
-          <a:xfrm rot="10800000">
-            <a:off x="10637215" y="0"/>
-            <a:ext cx="914400" cy="1554480"/>
-          </a:xfrm>
-          <a:prstGeom prst="round2SameRect">
+          <a:xfrm>
+            <a:off x="640080" y="566928"/>
+            <a:ext cx="64008" cy="868680"/>
+          </a:xfrm>
+          <a:prstGeom prst="roundRect">
             <a:avLst>
-              <a:gd name="adj1" fmla="val 50000"/>
-              <a:gd name="adj2" fmla="val 0"/>
+              <a:gd name="adj" fmla="val 50000"/>
             </a:avLst>
           </a:prstGeom>
           <a:solidFill>
-            <a:srgbClr val="D4E3F7"/>
+            <a:srgbClr val="97BBED"/>
           </a:solidFill>
           <a:ln>
             <a:noFill/>
@@ -5421,6 +5706,73 @@
       </p:sp>
       <p:sp>
         <p:nvSpPr>
+          <p:cNvPr id="4" name="상단 라벨"/>
+          <p:cNvSpPr txBox="1"/>
+          <p:nvPr/>
+        </p:nvSpPr>
+        <p:spPr>
+          <a:xfrm>
+            <a:off x="868680" y="274320"/>
+            <a:ext cx="5486400" cy="274320"/>
+          </a:xfrm>
+          <a:prstGeom prst="rect">
+            <a:avLst/>
+          </a:prstGeom>
+          <a:noFill/>
+        </p:spPr>
+        <p:txBody>
+          <a:bodyPr wrap="square" lIns="54864" rIns="54864" tIns="27432" bIns="27432" anchor="ctr">
+            <a:noAutofit/>
+          </a:bodyPr>
+          <a:lstStyle/>
+          <a:p>
+            <a:pPr algn="l">
+              <a:lnSpc>
+                <a:spcPct val="115000"/>
+              </a:lnSpc>
+            </a:pPr>
+            <a:r>
+              <a:rPr sz="900" b="1" i="0" spc="250">
+                <a:solidFill>
+                  <a:srgbClr val="8E8780"/>
+                </a:solidFill>
+              </a:rPr>
+              <a:t>WEDDING</a:t>
+            </a:r>
+          </a:p>
+        </p:txBody>
+      </p:sp>
+      <p:sp>
+        <p:nvSpPr>
+          <p:cNvPr id="5" name="포인트"/>
+          <p:cNvSpPr/>
+          <p:nvPr/>
+        </p:nvSpPr>
+        <p:spPr>
+          <a:xfrm>
+            <a:off x="11167567" y="667512"/>
+            <a:ext cx="310896" cy="310896"/>
+          </a:xfrm>
+          <a:prstGeom prst="moon">
+            <a:avLst/>
+          </a:prstGeom>
+          <a:solidFill>
+            <a:srgbClr val="A6C6F2"/>
+          </a:solidFill>
+          <a:ln>
+            <a:noFill/>
+          </a:ln>
+        </p:spPr>
+        <p:txBody>
+          <a:bodyPr rtlCol="0" anchor="ctr"/>
+          <a:lstStyle/>
+          <a:p>
+            <a:pPr algn="ctr"/>
+          </a:p>
+        </p:txBody>
+      </p:sp>
+      <p:sp>
+        <p:nvSpPr>
           <p:cNvPr id="2" name="Title 1"/>
           <p:cNvSpPr>
             <a:spLocks noGrp="1"/>
@@ -5431,8 +5783,8 @@
         </p:nvSpPr>
         <p:spPr>
           <a:xfrm>
-            <a:off x="640080" y="457200"/>
-            <a:ext cx="9722815" cy="868680"/>
+            <a:off x="868680" y="566928"/>
+            <a:ext cx="9448495" cy="868680"/>
           </a:xfrm>
         </p:spPr>
         <p:txBody>
@@ -5449,7 +5801,7 @@
             <a:r>
               <a:rPr sz="3000" b="1" i="0">
                 <a:solidFill>
-                  <a:srgbClr val="1D4072"/>
+                  <a:srgbClr val="26231F"/>
                 </a:solidFill>
               </a:rPr>
               <a:t>웨딩 사진</a:t>
@@ -5459,14 +5811,14 @@
       </p:sp>
       <p:sp>
         <p:nvSpPr>
-          <p:cNvPr id="4" name="사진 자리"/>
+          <p:cNvPr id="6" name="사진 자리"/>
           <p:cNvSpPr/>
           <p:nvPr/>
         </p:nvSpPr>
         <p:spPr>
           <a:xfrm>
-            <a:off x="640080" y="1600200"/>
-            <a:ext cx="3515258" cy="2308860"/>
+            <a:off x="640080" y="1783080"/>
+            <a:ext cx="3515258" cy="2194560"/>
           </a:xfrm>
           <a:prstGeom prst="roundRect">
             <a:avLst>
@@ -5474,12 +5826,10 @@
             </a:avLst>
           </a:prstGeom>
           <a:solidFill>
-            <a:srgbClr val="D4E3F7"/>
+            <a:srgbClr val="D1E2FA"/>
           </a:solidFill>
           <a:ln w="19050">
-            <a:solidFill>
-              <a:srgbClr val="4981D0"/>
-            </a:solidFill>
+            <a:noFill/>
             <a:prstDash val="dash"/>
           </a:ln>
         </p:spPr>
@@ -5497,7 +5847,7 @@
             <a:r>
               <a:rPr sz="1200" b="0" i="0">
                 <a:solidFill>
-                  <a:srgbClr val="1D4072"/>
+                  <a:srgbClr val="8E8780"/>
                 </a:solidFill>
               </a:rPr>
               <a:t>사진 1</a:t>
@@ -5507,14 +5857,14 @@
       </p:sp>
       <p:sp>
         <p:nvSpPr>
-          <p:cNvPr id="5" name="사진 자리"/>
+          <p:cNvPr id="7" name="사진 자리"/>
           <p:cNvSpPr/>
           <p:nvPr/>
         </p:nvSpPr>
         <p:spPr>
           <a:xfrm>
-            <a:off x="4338218" y="1600200"/>
-            <a:ext cx="3515258" cy="2308860"/>
+            <a:off x="4338218" y="1783080"/>
+            <a:ext cx="3515258" cy="2194560"/>
           </a:xfrm>
           <a:prstGeom prst="roundRect">
             <a:avLst>
@@ -5522,12 +5872,10 @@
             </a:avLst>
           </a:prstGeom>
           <a:solidFill>
-            <a:srgbClr val="D4E3F7"/>
+            <a:srgbClr val="D1E2FA"/>
           </a:solidFill>
           <a:ln w="19050">
-            <a:solidFill>
-              <a:srgbClr val="4981D0"/>
-            </a:solidFill>
+            <a:noFill/>
             <a:prstDash val="dash"/>
           </a:ln>
         </p:spPr>
@@ -5545,7 +5893,7 @@
             <a:r>
               <a:rPr sz="1200" b="0" i="0">
                 <a:solidFill>
-                  <a:srgbClr val="1D4072"/>
+                  <a:srgbClr val="8E8780"/>
                 </a:solidFill>
               </a:rPr>
               <a:t>사진 2</a:t>
@@ -5555,14 +5903,14 @@
       </p:sp>
       <p:sp>
         <p:nvSpPr>
-          <p:cNvPr id="6" name="사진 자리"/>
+          <p:cNvPr id="8" name="사진 자리"/>
           <p:cNvSpPr/>
           <p:nvPr/>
         </p:nvSpPr>
         <p:spPr>
           <a:xfrm>
-            <a:off x="8036356" y="1600200"/>
-            <a:ext cx="3515258" cy="2308860"/>
+            <a:off x="8036356" y="1783080"/>
+            <a:ext cx="3515258" cy="2194560"/>
           </a:xfrm>
           <a:prstGeom prst="roundRect">
             <a:avLst>
@@ -5570,12 +5918,10 @@
             </a:avLst>
           </a:prstGeom>
           <a:solidFill>
-            <a:srgbClr val="D4E3F7"/>
+            <a:srgbClr val="D1E2FA"/>
           </a:solidFill>
           <a:ln w="19050">
-            <a:solidFill>
-              <a:srgbClr val="4981D0"/>
-            </a:solidFill>
+            <a:noFill/>
             <a:prstDash val="dash"/>
           </a:ln>
         </p:spPr>
@@ -5593,7 +5939,7 @@
             <a:r>
               <a:rPr sz="1200" b="0" i="0">
                 <a:solidFill>
-                  <a:srgbClr val="1D4072"/>
+                  <a:srgbClr val="8E8780"/>
                 </a:solidFill>
               </a:rPr>
               <a:t>사진 3</a:t>
@@ -5603,14 +5949,14 @@
       </p:sp>
       <p:sp>
         <p:nvSpPr>
-          <p:cNvPr id="7" name="사진 자리"/>
+          <p:cNvPr id="9" name="사진 자리"/>
           <p:cNvSpPr/>
           <p:nvPr/>
         </p:nvSpPr>
         <p:spPr>
           <a:xfrm>
-            <a:off x="640080" y="4091939"/>
-            <a:ext cx="3515258" cy="2308860"/>
+            <a:off x="640080" y="4160520"/>
+            <a:ext cx="3515258" cy="2194560"/>
           </a:xfrm>
           <a:prstGeom prst="roundRect">
             <a:avLst>
@@ -5618,12 +5964,10 @@
             </a:avLst>
           </a:prstGeom>
           <a:solidFill>
-            <a:srgbClr val="D4E3F7"/>
+            <a:srgbClr val="D1E2FA"/>
           </a:solidFill>
           <a:ln w="19050">
-            <a:solidFill>
-              <a:srgbClr val="4981D0"/>
-            </a:solidFill>
+            <a:noFill/>
             <a:prstDash val="dash"/>
           </a:ln>
         </p:spPr>
@@ -5641,7 +5985,7 @@
             <a:r>
               <a:rPr sz="1200" b="0" i="0">
                 <a:solidFill>
-                  <a:srgbClr val="1D4072"/>
+                  <a:srgbClr val="8E8780"/>
                 </a:solidFill>
               </a:rPr>
               <a:t>사진 4</a:t>
@@ -5651,14 +5995,14 @@
       </p:sp>
       <p:sp>
         <p:nvSpPr>
-          <p:cNvPr id="8" name="사진 자리"/>
+          <p:cNvPr id="10" name="사진 자리"/>
           <p:cNvSpPr/>
           <p:nvPr/>
         </p:nvSpPr>
         <p:spPr>
           <a:xfrm>
-            <a:off x="4338218" y="4091939"/>
-            <a:ext cx="3515258" cy="2308860"/>
+            <a:off x="4338218" y="4160520"/>
+            <a:ext cx="3515258" cy="2194560"/>
           </a:xfrm>
           <a:prstGeom prst="roundRect">
             <a:avLst>
@@ -5666,12 +6010,10 @@
             </a:avLst>
           </a:prstGeom>
           <a:solidFill>
-            <a:srgbClr val="D4E3F7"/>
+            <a:srgbClr val="D1E2FA"/>
           </a:solidFill>
           <a:ln w="19050">
-            <a:solidFill>
-              <a:srgbClr val="4981D0"/>
-            </a:solidFill>
+            <a:noFill/>
             <a:prstDash val="dash"/>
           </a:ln>
         </p:spPr>
@@ -5689,7 +6031,7 @@
             <a:r>
               <a:rPr sz="1200" b="0" i="0">
                 <a:solidFill>
-                  <a:srgbClr val="1D4072"/>
+                  <a:srgbClr val="8E8780"/>
                 </a:solidFill>
               </a:rPr>
               <a:t>사진 5</a:t>
@@ -5699,14 +6041,14 @@
       </p:sp>
       <p:sp>
         <p:nvSpPr>
-          <p:cNvPr id="9" name="사진 자리"/>
+          <p:cNvPr id="11" name="사진 자리"/>
           <p:cNvSpPr/>
           <p:nvPr/>
         </p:nvSpPr>
         <p:spPr>
           <a:xfrm>
-            <a:off x="8036356" y="4091939"/>
-            <a:ext cx="3515258" cy="2308860"/>
+            <a:off x="8036356" y="4160520"/>
+            <a:ext cx="3515258" cy="2194560"/>
           </a:xfrm>
           <a:prstGeom prst="roundRect">
             <a:avLst>
@@ -5714,12 +6056,10 @@
             </a:avLst>
           </a:prstGeom>
           <a:solidFill>
-            <a:srgbClr val="D4E3F7"/>
+            <a:srgbClr val="D1E2FA"/>
           </a:solidFill>
           <a:ln w="19050">
-            <a:solidFill>
-              <a:srgbClr val="4981D0"/>
-            </a:solidFill>
+            <a:noFill/>
             <a:prstDash val="dash"/>
           </a:ln>
         </p:spPr>
@@ -5737,7 +6077,7 @@
             <a:r>
               <a:rPr sz="1200" b="0" i="0">
                 <a:solidFill>
-                  <a:srgbClr val="1D4072"/>
+                  <a:srgbClr val="8E8780"/>
                 </a:solidFill>
               </a:rPr>
               <a:t>사진 6</a:t>
@@ -5756,6 +6096,14 @@
 <file path=ppt/slides/slide6.xml><?xml version="1.0" encoding="utf-8"?>
 <p:sld xmlns:a="http://schemas.openxmlformats.org/drawingml/2006/main" xmlns:p="http://schemas.openxmlformats.org/presentationml/2006/main" xmlns:r="http://schemas.openxmlformats.org/officeDocument/2006/relationships">
   <p:cSld>
+    <p:bg>
+      <p:bgPr>
+        <a:solidFill>
+          <a:srgbClr val="EAF2FD"/>
+        </a:solidFill>
+        <a:effectLst/>
+      </p:bgPr>
+    </p:bg>
     <p:spTree>
       <p:nvGrpSpPr>
         <p:cNvPr id="1" name=""/>
@@ -5763,30 +6111,120 @@
         <p:nvPr/>
       </p:nvGrpSpPr>
       <p:grpSpPr/>
-      <p:pic>
-        <p:nvPicPr>
-          <p:cNvPr id="3" name="표지 그림" descr="wedding-08.jpg"/>
-          <p:cNvPicPr>
-            <a:picLocks noChangeAspect="1"/>
-          </p:cNvPicPr>
+      <p:sp>
+        <p:nvSpPr>
+          <p:cNvPr id="3" name="사진 자리"/>
+          <p:cNvSpPr/>
           <p:nvPr/>
-        </p:nvPicPr>
-        <p:blipFill>
-          <a:blip r:embed="rId2"/>
-          <a:stretch>
-            <a:fillRect/>
-          </a:stretch>
-        </p:blipFill>
-        <p:spPr>
-          <a:xfrm>
-            <a:off x="0" y="0"/>
-            <a:ext cx="12191695" cy="6858000"/>
+        </p:nvSpPr>
+        <p:spPr>
+          <a:xfrm>
+            <a:off x="7071183" y="960120"/>
+            <a:ext cx="3657508" cy="4526280"/>
+          </a:xfrm>
+          <a:prstGeom prst="roundRect">
+            <a:avLst>
+              <a:gd name="adj" fmla="val 4000"/>
+            </a:avLst>
+          </a:prstGeom>
+          <a:solidFill>
+            <a:srgbClr val="A6C6F2"/>
+          </a:solidFill>
+          <a:ln>
+            <a:noFill/>
+          </a:ln>
+        </p:spPr>
+        <p:txBody>
+          <a:bodyPr rtlCol="0" anchor="ctr" wrap="square" lIns="54864" rIns="54864" tIns="27432" bIns="27432">
+            <a:noAutofit/>
+          </a:bodyPr>
+          <a:lstStyle/>
+          <a:p>
+            <a:pPr algn="ctr">
+              <a:lnSpc>
+                <a:spcPct val="100000"/>
+              </a:lnSpc>
+            </a:pPr>
+            <a:r>
+              <a:rPr sz="1400" b="0" i="0">
+                <a:solidFill>
+                  <a:srgbClr val="273549"/>
+                </a:solidFill>
+              </a:rPr>
+              <a:t>사진을 넣어 주세요</a:t>
+            </a:r>
+          </a:p>
+        </p:txBody>
+      </p:sp>
+      <p:sp>
+        <p:nvSpPr>
+          <p:cNvPr id="4" name="장식"/>
+          <p:cNvSpPr/>
+          <p:nvPr/>
+        </p:nvSpPr>
+        <p:spPr>
+          <a:xfrm>
+            <a:off x="7558851" y="1234439"/>
+            <a:ext cx="3657508" cy="4526280"/>
+          </a:xfrm>
+          <a:prstGeom prst="roundRect">
+            <a:avLst>
+              <a:gd name="adj" fmla="val 4000"/>
+            </a:avLst>
+          </a:prstGeom>
+          <a:noFill/>
+          <a:ln w="9525">
+            <a:solidFill>
+              <a:srgbClr val="26231F"/>
+            </a:solidFill>
+          </a:ln>
+        </p:spPr>
+        <p:txBody>
+          <a:bodyPr rtlCol="0" anchor="ctr"/>
+          <a:lstStyle/>
+          <a:p>
+            <a:pPr algn="ctr"/>
+          </a:p>
+        </p:txBody>
+      </p:sp>
+      <p:sp>
+        <p:nvSpPr>
+          <p:cNvPr id="5" name="라벨"/>
+          <p:cNvSpPr txBox="1"/>
+          <p:nvPr/>
+        </p:nvSpPr>
+        <p:spPr>
+          <a:xfrm>
+            <a:off x="822960" y="2148840"/>
+            <a:ext cx="5608179" cy="274320"/>
           </a:xfrm>
           <a:prstGeom prst="rect">
             <a:avLst/>
           </a:prstGeom>
-        </p:spPr>
-      </p:pic>
+          <a:noFill/>
+        </p:spPr>
+        <p:txBody>
+          <a:bodyPr wrap="square" lIns="54864" rIns="54864" tIns="27432" bIns="27432" anchor="t">
+            <a:noAutofit/>
+          </a:bodyPr>
+          <a:lstStyle/>
+          <a:p>
+            <a:pPr algn="l">
+              <a:lnSpc>
+                <a:spcPct val="115000"/>
+              </a:lnSpc>
+            </a:pPr>
+            <a:r>
+              <a:rPr sz="1000" b="1" i="0" spc="250">
+                <a:solidFill>
+                  <a:srgbClr val="26231F"/>
+                </a:solidFill>
+              </a:rPr>
+              <a:t>WEDDING</a:t>
+            </a:r>
+          </a:p>
+        </p:txBody>
+      </p:sp>
       <p:sp>
         <p:nvSpPr>
           <p:cNvPr id="2" name="Title 1"/>
@@ -5799,8 +6237,8 @@
         </p:nvSpPr>
         <p:spPr>
           <a:xfrm>
-            <a:off x="853418" y="2057400"/>
-            <a:ext cx="6095847" cy="1554480"/>
+            <a:off x="822960" y="2606040"/>
+            <a:ext cx="5608179" cy="1188720"/>
           </a:xfrm>
         </p:spPr>
         <p:txBody>
@@ -5817,7 +6255,7 @@
             <a:r>
               <a:rPr sz="3400" b="1" i="0">
                 <a:solidFill>
-                  <a:srgbClr val="1D4072"/>
+                  <a:srgbClr val="26231F"/>
                 </a:solidFill>
               </a:rPr>
               <a:t>와 주셔서 고맙습니다</a:t>
@@ -5827,14 +6265,14 @@
       </p:sp>
       <p:sp>
         <p:nvSpPr>
-          <p:cNvPr id="4" name="한 줄 문구"/>
+          <p:cNvPr id="6" name="한 줄 문구"/>
           <p:cNvSpPr txBox="1"/>
           <p:nvPr/>
         </p:nvSpPr>
         <p:spPr>
           <a:xfrm>
-            <a:off x="853418" y="3749039"/>
-            <a:ext cx="6095847" cy="822960"/>
+            <a:off x="822960" y="3886200"/>
+            <a:ext cx="5608179" cy="822960"/>
           </a:xfrm>
           <a:prstGeom prst="rect">
             <a:avLst/>
@@ -5853,9 +6291,9 @@
               </a:lnSpc>
             </a:pPr>
             <a:r>
-              <a:rPr sz="1700" b="0" i="1">
+              <a:rPr sz="1700" b="0" i="0">
                 <a:solidFill>
-                  <a:srgbClr val="1D4072"/>
+                  <a:srgbClr val="26231F"/>
                 </a:solidFill>
               </a:rPr>
               <a:t>잘 살겠습니다</a:t>
@@ -5865,14 +6303,14 @@
       </p:sp>
       <p:sp>
         <p:nvSpPr>
-          <p:cNvPr id="5" name="안내 문구"/>
+          <p:cNvPr id="7" name="안내 문구"/>
           <p:cNvSpPr txBox="1"/>
           <p:nvPr/>
         </p:nvSpPr>
         <p:spPr>
           <a:xfrm>
-            <a:off x="853418" y="4617720"/>
-            <a:ext cx="6095847" cy="914400"/>
+            <a:off x="822960" y="4754880"/>
+            <a:ext cx="5608179" cy="914400"/>
           </a:xfrm>
           <a:prstGeom prst="rect">
             <a:avLst/>
@@ -5893,7 +6331,7 @@
             <a:r>
               <a:rPr sz="1400" b="0" i="0">
                 <a:solidFill>
-                  <a:srgbClr val="666666"/>
+                  <a:srgbClr val="26231F"/>
                 </a:solidFill>
               </a:rPr>
               <a:t>신랑 이름 ♥ 신부 이름</a:t>
@@ -5920,34 +6358,34 @@
         <a:sysClr val="window" lastClr="FFFFFF"/>
       </a:lt1>
       <a:dk2>
-        <a:srgbClr val="1D4072"/>
+        <a:srgbClr val="273549"/>
       </a:dk2>
       <a:lt2>
-        <a:srgbClr val="F3F7FC"/>
+        <a:srgbClr val="EAF2FD"/>
       </a:lt2>
       <a:accent1>
-        <a:srgbClr val="4981D0"/>
+        <a:srgbClr val="97BBED"/>
       </a:accent1>
       <a:accent2>
-        <a:srgbClr val="339941"/>
+        <a:srgbClr val="BCBAF3"/>
       </a:accent2>
       <a:accent3>
-        <a:srgbClr val="1D4072"/>
+        <a:srgbClr val="273549"/>
       </a:accent3>
       <a:accent4>
-        <a:srgbClr val="D4E3F7"/>
+        <a:srgbClr val="D1E2FA"/>
       </a:accent4>
       <a:accent5>
-        <a:srgbClr val="3E8D88"/>
+        <a:srgbClr val="AABAF0"/>
       </a:accent5>
       <a:accent6>
-        <a:srgbClr val="778CAA"/>
+        <a:srgbClr val="7D8692"/>
       </a:accent6>
       <a:hlink>
-        <a:srgbClr val="4981D0"/>
+        <a:srgbClr val="97BBED"/>
       </a:hlink>
       <a:folHlink>
-        <a:srgbClr val="1D4072"/>
+        <a:srgbClr val="273549"/>
       </a:folHlink>
     </a:clrScheme>
     <a:fontScheme name="Office">
